--- a/docs/user-guide/presentations/02-pwa-guide.pptx
+++ b/docs/user-guide/presentations/02-pwa-guide.pptx
@@ -15,9 +15,11 @@
     <p:sldId id="263" r:id="rId9"/>
     <p:sldId id="264" r:id="rId10"/>
     <p:sldId id="265" r:id="rId11"/>
+    <p:sldId id="266" r:id="rId12"/>
+    <p:sldId id="267" r:id="rId13"/>
   </p:sldIdLst>
   <p:notesMasterIdLst>
-    <p:notesMasterId r:id="rId12"/>
+    <p:notesMasterId r:id="rId14"/>
   </p:notesMasterIdLst>
   <p:sldSz cx="9144000" cy="5143500"/>
   <p:notesSz cx="5143500" cy="9144000"/>
@@ -623,6 +625,182 @@
             <a:fld id="{F7021451-1387-4CA6-816F-3879F97B5CBC}" type="slidenum">
               <a:rPr lang="en-US"/>
               <a:t>10</a:t>
+            </a:fld>
+            <a:endParaRPr lang="en-US"/>
+          </a:p>
+        </p:txBody>
+      </p:sp>
+    </p:spTree>
+    <p:extLst>
+      <p:ext uri="{BB962C8B-B14F-4D97-AF65-F5344CB8AC3E}">
+        <p14:creationId xmlns:p14="http://schemas.microsoft.com/office/powerpoint/2010/main" val="1024086991"/>
+      </p:ext>
+    </p:extLst>
+  </p:cSld>
+  <p:clrMapOvr>
+    <a:masterClrMapping/>
+  </p:clrMapOvr>
+</p:notes>
+</file>
+
+<file path=ppt/notesSlides/notesSlide11.xml><?xml version="1.0" encoding="utf-8"?>
+<p:notes xmlns:a="http://schemas.openxmlformats.org/drawingml/2006/main" xmlns:r="http://schemas.openxmlformats.org/officeDocument/2006/relationships" xmlns:p="http://schemas.openxmlformats.org/presentationml/2006/main">
+  <p:cSld>
+    <p:spTree>
+      <p:nvGrpSpPr>
+        <p:cNvPr id="1" name=""/>
+        <p:cNvGrpSpPr/>
+        <p:nvPr/>
+      </p:nvGrpSpPr>
+      <p:grpSpPr>
+        <a:xfrm>
+          <a:off x="0" y="0"/>
+          <a:ext cx="0" cy="0"/>
+          <a:chOff x="0" y="0"/>
+          <a:chExt cx="0" cy="0"/>
+        </a:xfrm>
+      </p:grpSpPr>
+      <p:sp>
+        <p:nvSpPr>
+          <p:cNvPr id="2" name="Slide Image Placeholder 1"/>
+          <p:cNvSpPr>
+            <a:spLocks noGrp="1" noRot="1" noChangeAspect="1"/>
+          </p:cNvSpPr>
+          <p:nvPr>
+            <p:ph type="sldImg"/>
+          </p:nvPr>
+        </p:nvSpPr>
+        <p:spPr/>
+      </p:sp>
+      <p:sp>
+        <p:nvSpPr>
+          <p:cNvPr id="3" name="Notes Placeholder 2"/>
+          <p:cNvSpPr>
+            <a:spLocks noGrp="1"/>
+          </p:cNvSpPr>
+          <p:nvPr>
+            <p:ph type="body" idx="1"/>
+          </p:nvPr>
+        </p:nvSpPr>
+        <p:spPr/>
+        <p:txBody>
+          <a:bodyPr/>
+          <a:lstStyle/>
+          <a:p>
+            <a:r>
+              <a:rPr lang="en-US" dirty="0"/>
+              <a:t/>
+            </a:r>
+            <a:endParaRPr lang="en-US" dirty="0"/>
+          </a:p>
+        </p:txBody>
+      </p:sp>
+      <p:sp>
+        <p:nvSpPr>
+          <p:cNvPr id="4" name="Slide Number Placeholder 3"/>
+          <p:cNvSpPr>
+            <a:spLocks noGrp="1"/>
+          </p:cNvSpPr>
+          <p:nvPr>
+            <p:ph type="sldNum" sz="quarter" idx="10"/>
+          </p:nvPr>
+        </p:nvSpPr>
+        <p:spPr/>
+        <p:txBody>
+          <a:bodyPr/>
+          <a:lstStyle/>
+          <a:p>
+            <a:fld id="{F7021451-1387-4CA6-816F-3879F97B5CBC}" type="slidenum">
+              <a:rPr lang="en-US"/>
+              <a:t>11</a:t>
+            </a:fld>
+            <a:endParaRPr lang="en-US"/>
+          </a:p>
+        </p:txBody>
+      </p:sp>
+    </p:spTree>
+    <p:extLst>
+      <p:ext uri="{BB962C8B-B14F-4D97-AF65-F5344CB8AC3E}">
+        <p14:creationId xmlns:p14="http://schemas.microsoft.com/office/powerpoint/2010/main" val="1024086991"/>
+      </p:ext>
+    </p:extLst>
+  </p:cSld>
+  <p:clrMapOvr>
+    <a:masterClrMapping/>
+  </p:clrMapOvr>
+</p:notes>
+</file>
+
+<file path=ppt/notesSlides/notesSlide12.xml><?xml version="1.0" encoding="utf-8"?>
+<p:notes xmlns:a="http://schemas.openxmlformats.org/drawingml/2006/main" xmlns:r="http://schemas.openxmlformats.org/officeDocument/2006/relationships" xmlns:p="http://schemas.openxmlformats.org/presentationml/2006/main">
+  <p:cSld>
+    <p:spTree>
+      <p:nvGrpSpPr>
+        <p:cNvPr id="1" name=""/>
+        <p:cNvGrpSpPr/>
+        <p:nvPr/>
+      </p:nvGrpSpPr>
+      <p:grpSpPr>
+        <a:xfrm>
+          <a:off x="0" y="0"/>
+          <a:ext cx="0" cy="0"/>
+          <a:chOff x="0" y="0"/>
+          <a:chExt cx="0" cy="0"/>
+        </a:xfrm>
+      </p:grpSpPr>
+      <p:sp>
+        <p:nvSpPr>
+          <p:cNvPr id="2" name="Slide Image Placeholder 1"/>
+          <p:cNvSpPr>
+            <a:spLocks noGrp="1" noRot="1" noChangeAspect="1"/>
+          </p:cNvSpPr>
+          <p:nvPr>
+            <p:ph type="sldImg"/>
+          </p:nvPr>
+        </p:nvSpPr>
+        <p:spPr/>
+      </p:sp>
+      <p:sp>
+        <p:nvSpPr>
+          <p:cNvPr id="3" name="Notes Placeholder 2"/>
+          <p:cNvSpPr>
+            <a:spLocks noGrp="1"/>
+          </p:cNvSpPr>
+          <p:nvPr>
+            <p:ph type="body" idx="1"/>
+          </p:nvPr>
+        </p:nvSpPr>
+        <p:spPr/>
+        <p:txBody>
+          <a:bodyPr/>
+          <a:lstStyle/>
+          <a:p>
+            <a:r>
+              <a:rPr lang="en-US" dirty="0"/>
+              <a:t/>
+            </a:r>
+            <a:endParaRPr lang="en-US" dirty="0"/>
+          </a:p>
+        </p:txBody>
+      </p:sp>
+      <p:sp>
+        <p:nvSpPr>
+          <p:cNvPr id="4" name="Slide Number Placeholder 3"/>
+          <p:cNvSpPr>
+            <a:spLocks noGrp="1"/>
+          </p:cNvSpPr>
+          <p:nvPr>
+            <p:ph type="sldNum" sz="quarter" idx="10"/>
+          </p:nvPr>
+        </p:nvSpPr>
+        <p:spPr/>
+        <p:txBody>
+          <a:bodyPr/>
+          <a:lstStyle/>
+          <a:p>
+            <a:fld id="{F7021451-1387-4CA6-816F-3879F97B5CBC}" type="slidenum">
+              <a:rPr lang="en-US"/>
+              <a:t>12</a:t>
             </a:fld>
             <a:endParaRPr lang="en-US"/>
           </a:p>
@@ -1973,6 +2151,1524 @@
         </p:nvSpPr>
         <p:spPr>
           <a:xfrm>
+            <a:off x="457200" y="274320"/>
+            <a:ext cx="8229600" cy="0"/>
+          </a:xfrm>
+          <a:prstGeom prst="rect">
+            <a:avLst/>
+          </a:prstGeom>
+          <a:noFill/>
+          <a:ln/>
+        </p:spPr>
+        <p:txBody>
+          <a:bodyPr wrap="square" rtlCol="0" anchor="ctr"/>
+          <a:lstStyle/>
+          <a:p>
+            <a:pPr indent="0" marL="0">
+              <a:buNone/>
+            </a:pPr>
+            <a:r>
+              <a:rPr lang="en-US" sz="2800" b="1" dirty="0">
+                <a:solidFill>
+                  <a:srgbClr val="1E40AF"/>
+                </a:solidFill>
+              </a:rPr>
+              <a:t>백그라운드 동기화 - 상태 표시</a:t>
+            </a:r>
+            <a:endParaRPr lang="en-US" sz="2800" dirty="0"/>
+          </a:p>
+        </p:txBody>
+      </p:sp>
+      <p:graphicFrame>
+        <p:nvGraphicFramePr>
+          <p:cNvPr id="11" name="Table 0"/>
+          <p:cNvGraphicFramePr>
+            <a:graphicFrameLocks noGrp="1"/>
+          </p:cNvGraphicFramePr>
+          <p:nvPr>
+            <p:extLst>
+              <p:ext uri="{D42A27DB-BD31-4B8C-83A1-F6EECF244321}">
+                <p14:modId xmlns:p14="http://schemas.microsoft.com/office/powerpoint/2010/main" val="1579011935"/>
+              </p:ext>
+            </p:extLst>
+          </p:nvPr>
+        </p:nvGraphicFramePr>
+        <p:xfrm>
+          <a:off x="457200" y="914400"/>
+          <a:ext cx="8229600" cy="914400"/>
+        </p:xfrm>
+        <a:graphic>
+          <a:graphicData uri="http://schemas.openxmlformats.org/drawingml/2006/table">
+            <a:tbl>
+              <a:tblPr/>
+              <a:tblGrid>
+                <a:gridCol w="2743200"/>
+                <a:gridCol w="2743200"/>
+                <a:gridCol w="2743200"/>
+              </a:tblGrid>
+              <a:tr h="0">
+                <a:tc>
+                  <a:txBody>
+                    <a:bodyPr/>
+                    <a:lstStyle/>
+                    <a:p>
+                      <a:pPr indent="0" marL="0">
+                        <a:buNone/>
+                      </a:pPr>
+                      <a:r>
+                        <a:rPr lang="en-US" sz="1200" b="1" dirty="0">
+                          <a:solidFill>
+                            <a:srgbClr val="FFFFFF"/>
+                          </a:solidFill>
+                          <a:latin typeface="Apple SD Gothic Neo" pitchFamily="34" charset="0"/>
+                          <a:ea typeface="Apple SD Gothic Neo" pitchFamily="34" charset="-122"/>
+                          <a:cs typeface="Apple SD Gothic Neo" pitchFamily="34" charset="-120"/>
+                        </a:rPr>
+                        <a:t>상태</a:t>
+                      </a:r>
+                      <a:endParaRPr lang="en-US" sz="1200" dirty="0">
+                        <a:latin typeface="Apple SD Gothic Neo" charset="0"/>
+                        <a:ea typeface="Apple SD Gothic Neo" charset="0"/>
+                        <a:cs typeface="Apple SD Gothic Neo" charset="0"/>
+                      </a:endParaRPr>
+                    </a:p>
+                  </a:txBody>
+                  <a:tcPr marL="91440" marR="91440" marT="45720" marB="45720">
+                    <a:lnL w="6350" cap="flat" cmpd="sng" algn="ctr">
+                      <a:solidFill>
+                        <a:srgbClr val="E5E7EB"/>
+                      </a:solidFill>
+                      <a:prstDash val="solid"/>
+                      <a:round/>
+                      <a:headEnd type="none" w="med" len="med"/>
+                      <a:tailEnd type="none" w="med" len="med"/>
+                    </a:lnL>
+                    <a:lnR w="6350" cap="flat" cmpd="sng" algn="ctr">
+                      <a:solidFill>
+                        <a:srgbClr val="E5E7EB"/>
+                      </a:solidFill>
+                      <a:prstDash val="solid"/>
+                      <a:round/>
+                      <a:headEnd type="none" w="med" len="med"/>
+                      <a:tailEnd type="none" w="med" len="med"/>
+                    </a:lnR>
+                    <a:lnT w="6350" cap="flat" cmpd="sng" algn="ctr">
+                      <a:solidFill>
+                        <a:srgbClr val="E5E7EB"/>
+                      </a:solidFill>
+                      <a:prstDash val="solid"/>
+                      <a:round/>
+                      <a:headEnd type="none" w="med" len="med"/>
+                      <a:tailEnd type="none" w="med" len="med"/>
+                    </a:lnT>
+                    <a:lnB w="6350" cap="flat" cmpd="sng" algn="ctr">
+                      <a:solidFill>
+                        <a:srgbClr val="E5E7EB"/>
+                      </a:solidFill>
+                      <a:prstDash val="solid"/>
+                      <a:round/>
+                      <a:headEnd type="none" w="med" len="med"/>
+                      <a:tailEnd type="none" w="med" len="med"/>
+                    </a:lnB>
+                    <a:solidFill>
+                      <a:srgbClr val="3B82F6"/>
+                    </a:solidFill>
+                  </a:tcPr>
+                </a:tc>
+                <a:tc>
+                  <a:txBody>
+                    <a:bodyPr/>
+                    <a:lstStyle/>
+                    <a:p>
+                      <a:pPr indent="0" marL="0">
+                        <a:buNone/>
+                      </a:pPr>
+                      <a:r>
+                        <a:rPr lang="en-US" sz="1200" b="1" dirty="0">
+                          <a:solidFill>
+                            <a:srgbClr val="FFFFFF"/>
+                          </a:solidFill>
+                          <a:latin typeface="Apple SD Gothic Neo" pitchFamily="34" charset="0"/>
+                          <a:ea typeface="Apple SD Gothic Neo" pitchFamily="34" charset="-122"/>
+                          <a:cs typeface="Apple SD Gothic Neo" pitchFamily="34" charset="-120"/>
+                        </a:rPr>
+                        <a:t>배너 색상</a:t>
+                      </a:r>
+                      <a:endParaRPr lang="en-US" sz="1200" dirty="0">
+                        <a:latin typeface="Apple SD Gothic Neo" charset="0"/>
+                        <a:ea typeface="Apple SD Gothic Neo" charset="0"/>
+                        <a:cs typeface="Apple SD Gothic Neo" charset="0"/>
+                      </a:endParaRPr>
+                    </a:p>
+                  </a:txBody>
+                  <a:tcPr marL="91440" marR="91440" marT="45720" marB="45720">
+                    <a:lnL w="6350" cap="flat" cmpd="sng" algn="ctr">
+                      <a:solidFill>
+                        <a:srgbClr val="E5E7EB"/>
+                      </a:solidFill>
+                      <a:prstDash val="solid"/>
+                      <a:round/>
+                      <a:headEnd type="none" w="med" len="med"/>
+                      <a:tailEnd type="none" w="med" len="med"/>
+                    </a:lnL>
+                    <a:lnR w="6350" cap="flat" cmpd="sng" algn="ctr">
+                      <a:solidFill>
+                        <a:srgbClr val="E5E7EB"/>
+                      </a:solidFill>
+                      <a:prstDash val="solid"/>
+                      <a:round/>
+                      <a:headEnd type="none" w="med" len="med"/>
+                      <a:tailEnd type="none" w="med" len="med"/>
+                    </a:lnR>
+                    <a:lnT w="6350" cap="flat" cmpd="sng" algn="ctr">
+                      <a:solidFill>
+                        <a:srgbClr val="E5E7EB"/>
+                      </a:solidFill>
+                      <a:prstDash val="solid"/>
+                      <a:round/>
+                      <a:headEnd type="none" w="med" len="med"/>
+                      <a:tailEnd type="none" w="med" len="med"/>
+                    </a:lnT>
+                    <a:lnB w="6350" cap="flat" cmpd="sng" algn="ctr">
+                      <a:solidFill>
+                        <a:srgbClr val="E5E7EB"/>
+                      </a:solidFill>
+                      <a:prstDash val="solid"/>
+                      <a:round/>
+                      <a:headEnd type="none" w="med" len="med"/>
+                      <a:tailEnd type="none" w="med" len="med"/>
+                    </a:lnB>
+                    <a:solidFill>
+                      <a:srgbClr val="3B82F6"/>
+                    </a:solidFill>
+                  </a:tcPr>
+                </a:tc>
+                <a:tc>
+                  <a:txBody>
+                    <a:bodyPr/>
+                    <a:lstStyle/>
+                    <a:p>
+                      <a:pPr indent="0" marL="0">
+                        <a:buNone/>
+                      </a:pPr>
+                      <a:r>
+                        <a:rPr lang="en-US" sz="1200" b="1" dirty="0">
+                          <a:solidFill>
+                            <a:srgbClr val="FFFFFF"/>
+                          </a:solidFill>
+                          <a:latin typeface="Apple SD Gothic Neo" pitchFamily="34" charset="0"/>
+                          <a:ea typeface="Apple SD Gothic Neo" pitchFamily="34" charset="-122"/>
+                          <a:cs typeface="Apple SD Gothic Neo" pitchFamily="34" charset="-120"/>
+                        </a:rPr>
+                        <a:t>설명</a:t>
+                      </a:r>
+                      <a:endParaRPr lang="en-US" sz="1200" dirty="0">
+                        <a:latin typeface="Apple SD Gothic Neo" charset="0"/>
+                        <a:ea typeface="Apple SD Gothic Neo" charset="0"/>
+                        <a:cs typeface="Apple SD Gothic Neo" charset="0"/>
+                      </a:endParaRPr>
+                    </a:p>
+                  </a:txBody>
+                  <a:tcPr marL="91440" marR="91440" marT="45720" marB="45720">
+                    <a:lnL w="6350" cap="flat" cmpd="sng" algn="ctr">
+                      <a:solidFill>
+                        <a:srgbClr val="E5E7EB"/>
+                      </a:solidFill>
+                      <a:prstDash val="solid"/>
+                      <a:round/>
+                      <a:headEnd type="none" w="med" len="med"/>
+                      <a:tailEnd type="none" w="med" len="med"/>
+                    </a:lnL>
+                    <a:lnR w="6350" cap="flat" cmpd="sng" algn="ctr">
+                      <a:solidFill>
+                        <a:srgbClr val="E5E7EB"/>
+                      </a:solidFill>
+                      <a:prstDash val="solid"/>
+                      <a:round/>
+                      <a:headEnd type="none" w="med" len="med"/>
+                      <a:tailEnd type="none" w="med" len="med"/>
+                    </a:lnR>
+                    <a:lnT w="6350" cap="flat" cmpd="sng" algn="ctr">
+                      <a:solidFill>
+                        <a:srgbClr val="E5E7EB"/>
+                      </a:solidFill>
+                      <a:prstDash val="solid"/>
+                      <a:round/>
+                      <a:headEnd type="none" w="med" len="med"/>
+                      <a:tailEnd type="none" w="med" len="med"/>
+                    </a:lnT>
+                    <a:lnB w="6350" cap="flat" cmpd="sng" algn="ctr">
+                      <a:solidFill>
+                        <a:srgbClr val="E5E7EB"/>
+                      </a:solidFill>
+                      <a:prstDash val="solid"/>
+                      <a:round/>
+                      <a:headEnd type="none" w="med" len="med"/>
+                      <a:tailEnd type="none" w="med" len="med"/>
+                    </a:lnB>
+                    <a:solidFill>
+                      <a:srgbClr val="3B82F6"/>
+                    </a:solidFill>
+                  </a:tcPr>
+                </a:tc>
+              </a:tr>
+              <a:tr h="0">
+                <a:tc>
+                  <a:txBody>
+                    <a:bodyPr/>
+                    <a:lstStyle/>
+                    <a:p>
+                      <a:pPr indent="0" marL="0">
+                        <a:buNone/>
+                      </a:pPr>
+                      <a:r>
+                        <a:rPr lang="en-US" sz="1100" dirty="0">
+                          <a:solidFill>
+                            <a:srgbClr val="374151"/>
+                          </a:solidFill>
+                          <a:latin typeface="Apple SD Gothic Neo" pitchFamily="34" charset="0"/>
+                          <a:ea typeface="Apple SD Gothic Neo" pitchFamily="34" charset="-122"/>
+                          <a:cs typeface="Apple SD Gothic Neo" pitchFamily="34" charset="-120"/>
+                        </a:rPr>
+                        <a:t>오프라인</a:t>
+                      </a:r>
+                      <a:endParaRPr lang="en-US" sz="1100" dirty="0">
+                        <a:latin typeface="Apple SD Gothic Neo" charset="0"/>
+                        <a:ea typeface="Apple SD Gothic Neo" charset="0"/>
+                        <a:cs typeface="Apple SD Gothic Neo" charset="0"/>
+                      </a:endParaRPr>
+                    </a:p>
+                  </a:txBody>
+                  <a:tcPr marL="91440" marR="91440" marT="45720" marB="45720">
+                    <a:lnL w="6350" cap="flat" cmpd="sng" algn="ctr">
+                      <a:solidFill>
+                        <a:srgbClr val="E5E7EB"/>
+                      </a:solidFill>
+                      <a:prstDash val="solid"/>
+                      <a:round/>
+                      <a:headEnd type="none" w="med" len="med"/>
+                      <a:tailEnd type="none" w="med" len="med"/>
+                    </a:lnL>
+                    <a:lnR w="6350" cap="flat" cmpd="sng" algn="ctr">
+                      <a:solidFill>
+                        <a:srgbClr val="E5E7EB"/>
+                      </a:solidFill>
+                      <a:prstDash val="solid"/>
+                      <a:round/>
+                      <a:headEnd type="none" w="med" len="med"/>
+                      <a:tailEnd type="none" w="med" len="med"/>
+                    </a:lnR>
+                    <a:lnT w="6350" cap="flat" cmpd="sng" algn="ctr">
+                      <a:solidFill>
+                        <a:srgbClr val="E5E7EB"/>
+                      </a:solidFill>
+                      <a:prstDash val="solid"/>
+                      <a:round/>
+                      <a:headEnd type="none" w="med" len="med"/>
+                      <a:tailEnd type="none" w="med" len="med"/>
+                    </a:lnT>
+                    <a:lnB w="6350" cap="flat" cmpd="sng" algn="ctr">
+                      <a:solidFill>
+                        <a:srgbClr val="E5E7EB"/>
+                      </a:solidFill>
+                      <a:prstDash val="solid"/>
+                      <a:round/>
+                      <a:headEnd type="none" w="med" len="med"/>
+                      <a:tailEnd type="none" w="med" len="med"/>
+                    </a:lnB>
+                  </a:tcPr>
+                </a:tc>
+                <a:tc>
+                  <a:txBody>
+                    <a:bodyPr/>
+                    <a:lstStyle/>
+                    <a:p>
+                      <a:pPr indent="0" marL="0">
+                        <a:buNone/>
+                      </a:pPr>
+                      <a:r>
+                        <a:rPr lang="en-US" sz="1100" dirty="0">
+                          <a:solidFill>
+                            <a:srgbClr val="374151"/>
+                          </a:solidFill>
+                          <a:latin typeface="Apple SD Gothic Neo" pitchFamily="34" charset="0"/>
+                          <a:ea typeface="Apple SD Gothic Neo" pitchFamily="34" charset="-122"/>
+                          <a:cs typeface="Apple SD Gothic Neo" pitchFamily="34" charset="-120"/>
+                        </a:rPr>
+                        <a:t>노란색</a:t>
+                      </a:r>
+                      <a:endParaRPr lang="en-US" sz="1100" dirty="0">
+                        <a:latin typeface="Apple SD Gothic Neo" charset="0"/>
+                        <a:ea typeface="Apple SD Gothic Neo" charset="0"/>
+                        <a:cs typeface="Apple SD Gothic Neo" charset="0"/>
+                      </a:endParaRPr>
+                    </a:p>
+                  </a:txBody>
+                  <a:tcPr marL="91440" marR="91440" marT="45720" marB="45720">
+                    <a:lnL w="6350" cap="flat" cmpd="sng" algn="ctr">
+                      <a:solidFill>
+                        <a:srgbClr val="E5E7EB"/>
+                      </a:solidFill>
+                      <a:prstDash val="solid"/>
+                      <a:round/>
+                      <a:headEnd type="none" w="med" len="med"/>
+                      <a:tailEnd type="none" w="med" len="med"/>
+                    </a:lnL>
+                    <a:lnR w="6350" cap="flat" cmpd="sng" algn="ctr">
+                      <a:solidFill>
+                        <a:srgbClr val="E5E7EB"/>
+                      </a:solidFill>
+                      <a:prstDash val="solid"/>
+                      <a:round/>
+                      <a:headEnd type="none" w="med" len="med"/>
+                      <a:tailEnd type="none" w="med" len="med"/>
+                    </a:lnR>
+                    <a:lnT w="6350" cap="flat" cmpd="sng" algn="ctr">
+                      <a:solidFill>
+                        <a:srgbClr val="E5E7EB"/>
+                      </a:solidFill>
+                      <a:prstDash val="solid"/>
+                      <a:round/>
+                      <a:headEnd type="none" w="med" len="med"/>
+                      <a:tailEnd type="none" w="med" len="med"/>
+                    </a:lnT>
+                    <a:lnB w="6350" cap="flat" cmpd="sng" algn="ctr">
+                      <a:solidFill>
+                        <a:srgbClr val="E5E7EB"/>
+                      </a:solidFill>
+                      <a:prstDash val="solid"/>
+                      <a:round/>
+                      <a:headEnd type="none" w="med" len="med"/>
+                      <a:tailEnd type="none" w="med" len="med"/>
+                    </a:lnB>
+                  </a:tcPr>
+                </a:tc>
+                <a:tc>
+                  <a:txBody>
+                    <a:bodyPr/>
+                    <a:lstStyle/>
+                    <a:p>
+                      <a:pPr indent="0" marL="0">
+                        <a:buNone/>
+                      </a:pPr>
+                      <a:r>
+                        <a:rPr lang="en-US" sz="1100" dirty="0">
+                          <a:solidFill>
+                            <a:srgbClr val="374151"/>
+                          </a:solidFill>
+                          <a:latin typeface="Apple SD Gothic Neo" pitchFamily="34" charset="0"/>
+                          <a:ea typeface="Apple SD Gothic Neo" pitchFamily="34" charset="-122"/>
+                          <a:cs typeface="Apple SD Gothic Neo" pitchFamily="34" charset="-120"/>
+                        </a:rPr>
+                        <a:t>인터넷 연결 없음</a:t>
+                      </a:r>
+                      <a:endParaRPr lang="en-US" sz="1100" dirty="0">
+                        <a:latin typeface="Apple SD Gothic Neo" charset="0"/>
+                        <a:ea typeface="Apple SD Gothic Neo" charset="0"/>
+                        <a:cs typeface="Apple SD Gothic Neo" charset="0"/>
+                      </a:endParaRPr>
+                    </a:p>
+                  </a:txBody>
+                  <a:tcPr marL="91440" marR="91440" marT="45720" marB="45720">
+                    <a:lnL w="6350" cap="flat" cmpd="sng" algn="ctr">
+                      <a:solidFill>
+                        <a:srgbClr val="E5E7EB"/>
+                      </a:solidFill>
+                      <a:prstDash val="solid"/>
+                      <a:round/>
+                      <a:headEnd type="none" w="med" len="med"/>
+                      <a:tailEnd type="none" w="med" len="med"/>
+                    </a:lnL>
+                    <a:lnR w="6350" cap="flat" cmpd="sng" algn="ctr">
+                      <a:solidFill>
+                        <a:srgbClr val="E5E7EB"/>
+                      </a:solidFill>
+                      <a:prstDash val="solid"/>
+                      <a:round/>
+                      <a:headEnd type="none" w="med" len="med"/>
+                      <a:tailEnd type="none" w="med" len="med"/>
+                    </a:lnR>
+                    <a:lnT w="6350" cap="flat" cmpd="sng" algn="ctr">
+                      <a:solidFill>
+                        <a:srgbClr val="E5E7EB"/>
+                      </a:solidFill>
+                      <a:prstDash val="solid"/>
+                      <a:round/>
+                      <a:headEnd type="none" w="med" len="med"/>
+                      <a:tailEnd type="none" w="med" len="med"/>
+                    </a:lnT>
+                    <a:lnB w="6350" cap="flat" cmpd="sng" algn="ctr">
+                      <a:solidFill>
+                        <a:srgbClr val="E5E7EB"/>
+                      </a:solidFill>
+                      <a:prstDash val="solid"/>
+                      <a:round/>
+                      <a:headEnd type="none" w="med" len="med"/>
+                      <a:tailEnd type="none" w="med" len="med"/>
+                    </a:lnB>
+                  </a:tcPr>
+                </a:tc>
+              </a:tr>
+              <a:tr h="0">
+                <a:tc>
+                  <a:txBody>
+                    <a:bodyPr/>
+                    <a:lstStyle/>
+                    <a:p>
+                      <a:pPr indent="0" marL="0">
+                        <a:buNone/>
+                      </a:pPr>
+                      <a:r>
+                        <a:rPr lang="en-US" sz="1100" dirty="0">
+                          <a:solidFill>
+                            <a:srgbClr val="374151"/>
+                          </a:solidFill>
+                          <a:latin typeface="Apple SD Gothic Neo" pitchFamily="34" charset="0"/>
+                          <a:ea typeface="Apple SD Gothic Neo" pitchFamily="34" charset="-122"/>
+                          <a:cs typeface="Apple SD Gothic Neo" pitchFamily="34" charset="-120"/>
+                        </a:rPr>
+                        <a:t>동기화 대기</a:t>
+                      </a:r>
+                      <a:endParaRPr lang="en-US" sz="1100" dirty="0">
+                        <a:latin typeface="Apple SD Gothic Neo" charset="0"/>
+                        <a:ea typeface="Apple SD Gothic Neo" charset="0"/>
+                        <a:cs typeface="Apple SD Gothic Neo" charset="0"/>
+                      </a:endParaRPr>
+                    </a:p>
+                  </a:txBody>
+                  <a:tcPr marL="91440" marR="91440" marT="45720" marB="45720">
+                    <a:lnL w="6350" cap="flat" cmpd="sng" algn="ctr">
+                      <a:solidFill>
+                        <a:srgbClr val="E5E7EB"/>
+                      </a:solidFill>
+                      <a:prstDash val="solid"/>
+                      <a:round/>
+                      <a:headEnd type="none" w="med" len="med"/>
+                      <a:tailEnd type="none" w="med" len="med"/>
+                    </a:lnL>
+                    <a:lnR w="6350" cap="flat" cmpd="sng" algn="ctr">
+                      <a:solidFill>
+                        <a:srgbClr val="E5E7EB"/>
+                      </a:solidFill>
+                      <a:prstDash val="solid"/>
+                      <a:round/>
+                      <a:headEnd type="none" w="med" len="med"/>
+                      <a:tailEnd type="none" w="med" len="med"/>
+                    </a:lnR>
+                    <a:lnT w="6350" cap="flat" cmpd="sng" algn="ctr">
+                      <a:solidFill>
+                        <a:srgbClr val="E5E7EB"/>
+                      </a:solidFill>
+                      <a:prstDash val="solid"/>
+                      <a:round/>
+                      <a:headEnd type="none" w="med" len="med"/>
+                      <a:tailEnd type="none" w="med" len="med"/>
+                    </a:lnT>
+                    <a:lnB w="6350" cap="flat" cmpd="sng" algn="ctr">
+                      <a:solidFill>
+                        <a:srgbClr val="E5E7EB"/>
+                      </a:solidFill>
+                      <a:prstDash val="solid"/>
+                      <a:round/>
+                      <a:headEnd type="none" w="med" len="med"/>
+                      <a:tailEnd type="none" w="med" len="med"/>
+                    </a:lnB>
+                  </a:tcPr>
+                </a:tc>
+                <a:tc>
+                  <a:txBody>
+                    <a:bodyPr/>
+                    <a:lstStyle/>
+                    <a:p>
+                      <a:pPr indent="0" marL="0">
+                        <a:buNone/>
+                      </a:pPr>
+                      <a:r>
+                        <a:rPr lang="en-US" sz="1100" dirty="0">
+                          <a:solidFill>
+                            <a:srgbClr val="374151"/>
+                          </a:solidFill>
+                          <a:latin typeface="Apple SD Gothic Neo" pitchFamily="34" charset="0"/>
+                          <a:ea typeface="Apple SD Gothic Neo" pitchFamily="34" charset="-122"/>
+                          <a:cs typeface="Apple SD Gothic Neo" pitchFamily="34" charset="-120"/>
+                        </a:rPr>
+                        <a:t>파란색</a:t>
+                      </a:r>
+                      <a:endParaRPr lang="en-US" sz="1100" dirty="0">
+                        <a:latin typeface="Apple SD Gothic Neo" charset="0"/>
+                        <a:ea typeface="Apple SD Gothic Neo" charset="0"/>
+                        <a:cs typeface="Apple SD Gothic Neo" charset="0"/>
+                      </a:endParaRPr>
+                    </a:p>
+                  </a:txBody>
+                  <a:tcPr marL="91440" marR="91440" marT="45720" marB="45720">
+                    <a:lnL w="6350" cap="flat" cmpd="sng" algn="ctr">
+                      <a:solidFill>
+                        <a:srgbClr val="E5E7EB"/>
+                      </a:solidFill>
+                      <a:prstDash val="solid"/>
+                      <a:round/>
+                      <a:headEnd type="none" w="med" len="med"/>
+                      <a:tailEnd type="none" w="med" len="med"/>
+                    </a:lnL>
+                    <a:lnR w="6350" cap="flat" cmpd="sng" algn="ctr">
+                      <a:solidFill>
+                        <a:srgbClr val="E5E7EB"/>
+                      </a:solidFill>
+                      <a:prstDash val="solid"/>
+                      <a:round/>
+                      <a:headEnd type="none" w="med" len="med"/>
+                      <a:tailEnd type="none" w="med" len="med"/>
+                    </a:lnR>
+                    <a:lnT w="6350" cap="flat" cmpd="sng" algn="ctr">
+                      <a:solidFill>
+                        <a:srgbClr val="E5E7EB"/>
+                      </a:solidFill>
+                      <a:prstDash val="solid"/>
+                      <a:round/>
+                      <a:headEnd type="none" w="med" len="med"/>
+                      <a:tailEnd type="none" w="med" len="med"/>
+                    </a:lnT>
+                    <a:lnB w="6350" cap="flat" cmpd="sng" algn="ctr">
+                      <a:solidFill>
+                        <a:srgbClr val="E5E7EB"/>
+                      </a:solidFill>
+                      <a:prstDash val="solid"/>
+                      <a:round/>
+                      <a:headEnd type="none" w="med" len="med"/>
+                      <a:tailEnd type="none" w="med" len="med"/>
+                    </a:lnB>
+                  </a:tcPr>
+                </a:tc>
+                <a:tc>
+                  <a:txBody>
+                    <a:bodyPr/>
+                    <a:lstStyle/>
+                    <a:p>
+                      <a:pPr indent="0" marL="0">
+                        <a:buNone/>
+                      </a:pPr>
+                      <a:r>
+                        <a:rPr lang="en-US" sz="1100" dirty="0">
+                          <a:solidFill>
+                            <a:srgbClr val="374151"/>
+                          </a:solidFill>
+                          <a:latin typeface="Apple SD Gothic Neo" pitchFamily="34" charset="0"/>
+                          <a:ea typeface="Apple SD Gothic Neo" pitchFamily="34" charset="-122"/>
+                          <a:cs typeface="Apple SD Gothic Neo" pitchFamily="34" charset="-120"/>
+                        </a:rPr>
+                        <a:t>N개 항목 대기 중</a:t>
+                      </a:r>
+                      <a:endParaRPr lang="en-US" sz="1100" dirty="0">
+                        <a:latin typeface="Apple SD Gothic Neo" charset="0"/>
+                        <a:ea typeface="Apple SD Gothic Neo" charset="0"/>
+                        <a:cs typeface="Apple SD Gothic Neo" charset="0"/>
+                      </a:endParaRPr>
+                    </a:p>
+                  </a:txBody>
+                  <a:tcPr marL="91440" marR="91440" marT="45720" marB="45720">
+                    <a:lnL w="6350" cap="flat" cmpd="sng" algn="ctr">
+                      <a:solidFill>
+                        <a:srgbClr val="E5E7EB"/>
+                      </a:solidFill>
+                      <a:prstDash val="solid"/>
+                      <a:round/>
+                      <a:headEnd type="none" w="med" len="med"/>
+                      <a:tailEnd type="none" w="med" len="med"/>
+                    </a:lnL>
+                    <a:lnR w="6350" cap="flat" cmpd="sng" algn="ctr">
+                      <a:solidFill>
+                        <a:srgbClr val="E5E7EB"/>
+                      </a:solidFill>
+                      <a:prstDash val="solid"/>
+                      <a:round/>
+                      <a:headEnd type="none" w="med" len="med"/>
+                      <a:tailEnd type="none" w="med" len="med"/>
+                    </a:lnR>
+                    <a:lnT w="6350" cap="flat" cmpd="sng" algn="ctr">
+                      <a:solidFill>
+                        <a:srgbClr val="E5E7EB"/>
+                      </a:solidFill>
+                      <a:prstDash val="solid"/>
+                      <a:round/>
+                      <a:headEnd type="none" w="med" len="med"/>
+                      <a:tailEnd type="none" w="med" len="med"/>
+                    </a:lnT>
+                    <a:lnB w="6350" cap="flat" cmpd="sng" algn="ctr">
+                      <a:solidFill>
+                        <a:srgbClr val="E5E7EB"/>
+                      </a:solidFill>
+                      <a:prstDash val="solid"/>
+                      <a:round/>
+                      <a:headEnd type="none" w="med" len="med"/>
+                      <a:tailEnd type="none" w="med" len="med"/>
+                    </a:lnB>
+                  </a:tcPr>
+                </a:tc>
+              </a:tr>
+              <a:tr h="0">
+                <a:tc>
+                  <a:txBody>
+                    <a:bodyPr/>
+                    <a:lstStyle/>
+                    <a:p>
+                      <a:pPr indent="0" marL="0">
+                        <a:buNone/>
+                      </a:pPr>
+                      <a:r>
+                        <a:rPr lang="en-US" sz="1100" dirty="0">
+                          <a:solidFill>
+                            <a:srgbClr val="374151"/>
+                          </a:solidFill>
+                          <a:latin typeface="Apple SD Gothic Neo" pitchFamily="34" charset="0"/>
+                          <a:ea typeface="Apple SD Gothic Neo" pitchFamily="34" charset="-122"/>
+                          <a:cs typeface="Apple SD Gothic Neo" pitchFamily="34" charset="-120"/>
+                        </a:rPr>
+                        <a:t>동기화 완료</a:t>
+                      </a:r>
+                      <a:endParaRPr lang="en-US" sz="1100" dirty="0">
+                        <a:latin typeface="Apple SD Gothic Neo" charset="0"/>
+                        <a:ea typeface="Apple SD Gothic Neo" charset="0"/>
+                        <a:cs typeface="Apple SD Gothic Neo" charset="0"/>
+                      </a:endParaRPr>
+                    </a:p>
+                  </a:txBody>
+                  <a:tcPr marL="91440" marR="91440" marT="45720" marB="45720">
+                    <a:lnL w="6350" cap="flat" cmpd="sng" algn="ctr">
+                      <a:solidFill>
+                        <a:srgbClr val="E5E7EB"/>
+                      </a:solidFill>
+                      <a:prstDash val="solid"/>
+                      <a:round/>
+                      <a:headEnd type="none" w="med" len="med"/>
+                      <a:tailEnd type="none" w="med" len="med"/>
+                    </a:lnL>
+                    <a:lnR w="6350" cap="flat" cmpd="sng" algn="ctr">
+                      <a:solidFill>
+                        <a:srgbClr val="E5E7EB"/>
+                      </a:solidFill>
+                      <a:prstDash val="solid"/>
+                      <a:round/>
+                      <a:headEnd type="none" w="med" len="med"/>
+                      <a:tailEnd type="none" w="med" len="med"/>
+                    </a:lnR>
+                    <a:lnT w="6350" cap="flat" cmpd="sng" algn="ctr">
+                      <a:solidFill>
+                        <a:srgbClr val="E5E7EB"/>
+                      </a:solidFill>
+                      <a:prstDash val="solid"/>
+                      <a:round/>
+                      <a:headEnd type="none" w="med" len="med"/>
+                      <a:tailEnd type="none" w="med" len="med"/>
+                    </a:lnT>
+                    <a:lnB w="6350" cap="flat" cmpd="sng" algn="ctr">
+                      <a:solidFill>
+                        <a:srgbClr val="E5E7EB"/>
+                      </a:solidFill>
+                      <a:prstDash val="solid"/>
+                      <a:round/>
+                      <a:headEnd type="none" w="med" len="med"/>
+                      <a:tailEnd type="none" w="med" len="med"/>
+                    </a:lnB>
+                  </a:tcPr>
+                </a:tc>
+                <a:tc>
+                  <a:txBody>
+                    <a:bodyPr/>
+                    <a:lstStyle/>
+                    <a:p>
+                      <a:pPr indent="0" marL="0">
+                        <a:buNone/>
+                      </a:pPr>
+                      <a:r>
+                        <a:rPr lang="en-US" sz="1100" dirty="0">
+                          <a:solidFill>
+                            <a:srgbClr val="374151"/>
+                          </a:solidFill>
+                          <a:latin typeface="Apple SD Gothic Neo" pitchFamily="34" charset="0"/>
+                          <a:ea typeface="Apple SD Gothic Neo" pitchFamily="34" charset="-122"/>
+                          <a:cs typeface="Apple SD Gothic Neo" pitchFamily="34" charset="-120"/>
+                        </a:rPr>
+                        <a:t>녹색</a:t>
+                      </a:r>
+                      <a:endParaRPr lang="en-US" sz="1100" dirty="0">
+                        <a:latin typeface="Apple SD Gothic Neo" charset="0"/>
+                        <a:ea typeface="Apple SD Gothic Neo" charset="0"/>
+                        <a:cs typeface="Apple SD Gothic Neo" charset="0"/>
+                      </a:endParaRPr>
+                    </a:p>
+                  </a:txBody>
+                  <a:tcPr marL="91440" marR="91440" marT="45720" marB="45720">
+                    <a:lnL w="6350" cap="flat" cmpd="sng" algn="ctr">
+                      <a:solidFill>
+                        <a:srgbClr val="E5E7EB"/>
+                      </a:solidFill>
+                      <a:prstDash val="solid"/>
+                      <a:round/>
+                      <a:headEnd type="none" w="med" len="med"/>
+                      <a:tailEnd type="none" w="med" len="med"/>
+                    </a:lnL>
+                    <a:lnR w="6350" cap="flat" cmpd="sng" algn="ctr">
+                      <a:solidFill>
+                        <a:srgbClr val="E5E7EB"/>
+                      </a:solidFill>
+                      <a:prstDash val="solid"/>
+                      <a:round/>
+                      <a:headEnd type="none" w="med" len="med"/>
+                      <a:tailEnd type="none" w="med" len="med"/>
+                    </a:lnR>
+                    <a:lnT w="6350" cap="flat" cmpd="sng" algn="ctr">
+                      <a:solidFill>
+                        <a:srgbClr val="E5E7EB"/>
+                      </a:solidFill>
+                      <a:prstDash val="solid"/>
+                      <a:round/>
+                      <a:headEnd type="none" w="med" len="med"/>
+                      <a:tailEnd type="none" w="med" len="med"/>
+                    </a:lnT>
+                    <a:lnB w="6350" cap="flat" cmpd="sng" algn="ctr">
+                      <a:solidFill>
+                        <a:srgbClr val="E5E7EB"/>
+                      </a:solidFill>
+                      <a:prstDash val="solid"/>
+                      <a:round/>
+                      <a:headEnd type="none" w="med" len="med"/>
+                      <a:tailEnd type="none" w="med" len="med"/>
+                    </a:lnB>
+                  </a:tcPr>
+                </a:tc>
+                <a:tc>
+                  <a:txBody>
+                    <a:bodyPr/>
+                    <a:lstStyle/>
+                    <a:p>
+                      <a:pPr indent="0" marL="0">
+                        <a:buNone/>
+                      </a:pPr>
+                      <a:r>
+                        <a:rPr lang="en-US" sz="1100" dirty="0">
+                          <a:solidFill>
+                            <a:srgbClr val="374151"/>
+                          </a:solidFill>
+                          <a:latin typeface="Apple SD Gothic Neo" pitchFamily="34" charset="0"/>
+                          <a:ea typeface="Apple SD Gothic Neo" pitchFamily="34" charset="-122"/>
+                          <a:cs typeface="Apple SD Gothic Neo" pitchFamily="34" charset="-120"/>
+                        </a:rPr>
+                        <a:t>모든 데이터 동기화됨</a:t>
+                      </a:r>
+                      <a:endParaRPr lang="en-US" sz="1100" dirty="0">
+                        <a:latin typeface="Apple SD Gothic Neo" charset="0"/>
+                        <a:ea typeface="Apple SD Gothic Neo" charset="0"/>
+                        <a:cs typeface="Apple SD Gothic Neo" charset="0"/>
+                      </a:endParaRPr>
+                    </a:p>
+                  </a:txBody>
+                  <a:tcPr marL="91440" marR="91440" marT="45720" marB="45720">
+                    <a:lnL w="6350" cap="flat" cmpd="sng" algn="ctr">
+                      <a:solidFill>
+                        <a:srgbClr val="E5E7EB"/>
+                      </a:solidFill>
+                      <a:prstDash val="solid"/>
+                      <a:round/>
+                      <a:headEnd type="none" w="med" len="med"/>
+                      <a:tailEnd type="none" w="med" len="med"/>
+                    </a:lnL>
+                    <a:lnR w="6350" cap="flat" cmpd="sng" algn="ctr">
+                      <a:solidFill>
+                        <a:srgbClr val="E5E7EB"/>
+                      </a:solidFill>
+                      <a:prstDash val="solid"/>
+                      <a:round/>
+                      <a:headEnd type="none" w="med" len="med"/>
+                      <a:tailEnd type="none" w="med" len="med"/>
+                    </a:lnR>
+                    <a:lnT w="6350" cap="flat" cmpd="sng" algn="ctr">
+                      <a:solidFill>
+                        <a:srgbClr val="E5E7EB"/>
+                      </a:solidFill>
+                      <a:prstDash val="solid"/>
+                      <a:round/>
+                      <a:headEnd type="none" w="med" len="med"/>
+                      <a:tailEnd type="none" w="med" len="med"/>
+                    </a:lnT>
+                    <a:lnB w="6350" cap="flat" cmpd="sng" algn="ctr">
+                      <a:solidFill>
+                        <a:srgbClr val="E5E7EB"/>
+                      </a:solidFill>
+                      <a:prstDash val="solid"/>
+                      <a:round/>
+                      <a:headEnd type="none" w="med" len="med"/>
+                      <a:tailEnd type="none" w="med" len="med"/>
+                    </a:lnB>
+                  </a:tcPr>
+                </a:tc>
+              </a:tr>
+              <a:tr h="0">
+                <a:tc>
+                  <a:txBody>
+                    <a:bodyPr/>
+                    <a:lstStyle/>
+                    <a:p>
+                      <a:pPr indent="0" marL="0">
+                        <a:buNone/>
+                      </a:pPr>
+                      <a:r>
+                        <a:rPr lang="en-US" sz="1100" dirty="0">
+                          <a:solidFill>
+                            <a:srgbClr val="374151"/>
+                          </a:solidFill>
+                          <a:latin typeface="Apple SD Gothic Neo" pitchFamily="34" charset="0"/>
+                          <a:ea typeface="Apple SD Gothic Neo" pitchFamily="34" charset="-122"/>
+                          <a:cs typeface="Apple SD Gothic Neo" pitchFamily="34" charset="-120"/>
+                        </a:rPr>
+                        <a:t>동기화 실패</a:t>
+                      </a:r>
+                      <a:endParaRPr lang="en-US" sz="1100" dirty="0">
+                        <a:latin typeface="Apple SD Gothic Neo" charset="0"/>
+                        <a:ea typeface="Apple SD Gothic Neo" charset="0"/>
+                        <a:cs typeface="Apple SD Gothic Neo" charset="0"/>
+                      </a:endParaRPr>
+                    </a:p>
+                  </a:txBody>
+                  <a:tcPr marL="91440" marR="91440" marT="45720" marB="45720">
+                    <a:lnL w="6350" cap="flat" cmpd="sng" algn="ctr">
+                      <a:solidFill>
+                        <a:srgbClr val="E5E7EB"/>
+                      </a:solidFill>
+                      <a:prstDash val="solid"/>
+                      <a:round/>
+                      <a:headEnd type="none" w="med" len="med"/>
+                      <a:tailEnd type="none" w="med" len="med"/>
+                    </a:lnL>
+                    <a:lnR w="6350" cap="flat" cmpd="sng" algn="ctr">
+                      <a:solidFill>
+                        <a:srgbClr val="E5E7EB"/>
+                      </a:solidFill>
+                      <a:prstDash val="solid"/>
+                      <a:round/>
+                      <a:headEnd type="none" w="med" len="med"/>
+                      <a:tailEnd type="none" w="med" len="med"/>
+                    </a:lnR>
+                    <a:lnT w="6350" cap="flat" cmpd="sng" algn="ctr">
+                      <a:solidFill>
+                        <a:srgbClr val="E5E7EB"/>
+                      </a:solidFill>
+                      <a:prstDash val="solid"/>
+                      <a:round/>
+                      <a:headEnd type="none" w="med" len="med"/>
+                      <a:tailEnd type="none" w="med" len="med"/>
+                    </a:lnT>
+                    <a:lnB w="6350" cap="flat" cmpd="sng" algn="ctr">
+                      <a:solidFill>
+                        <a:srgbClr val="E5E7EB"/>
+                      </a:solidFill>
+                      <a:prstDash val="solid"/>
+                      <a:round/>
+                      <a:headEnd type="none" w="med" len="med"/>
+                      <a:tailEnd type="none" w="med" len="med"/>
+                    </a:lnB>
+                  </a:tcPr>
+                </a:tc>
+                <a:tc>
+                  <a:txBody>
+                    <a:bodyPr/>
+                    <a:lstStyle/>
+                    <a:p>
+                      <a:pPr indent="0" marL="0">
+                        <a:buNone/>
+                      </a:pPr>
+                      <a:r>
+                        <a:rPr lang="en-US" sz="1100" dirty="0">
+                          <a:solidFill>
+                            <a:srgbClr val="374151"/>
+                          </a:solidFill>
+                          <a:latin typeface="Apple SD Gothic Neo" pitchFamily="34" charset="0"/>
+                          <a:ea typeface="Apple SD Gothic Neo" pitchFamily="34" charset="-122"/>
+                          <a:cs typeface="Apple SD Gothic Neo" pitchFamily="34" charset="-120"/>
+                        </a:rPr>
+                        <a:t>빨간색</a:t>
+                      </a:r>
+                      <a:endParaRPr lang="en-US" sz="1100" dirty="0">
+                        <a:latin typeface="Apple SD Gothic Neo" charset="0"/>
+                        <a:ea typeface="Apple SD Gothic Neo" charset="0"/>
+                        <a:cs typeface="Apple SD Gothic Neo" charset="0"/>
+                      </a:endParaRPr>
+                    </a:p>
+                  </a:txBody>
+                  <a:tcPr marL="91440" marR="91440" marT="45720" marB="45720">
+                    <a:lnL w="6350" cap="flat" cmpd="sng" algn="ctr">
+                      <a:solidFill>
+                        <a:srgbClr val="E5E7EB"/>
+                      </a:solidFill>
+                      <a:prstDash val="solid"/>
+                      <a:round/>
+                      <a:headEnd type="none" w="med" len="med"/>
+                      <a:tailEnd type="none" w="med" len="med"/>
+                    </a:lnL>
+                    <a:lnR w="6350" cap="flat" cmpd="sng" algn="ctr">
+                      <a:solidFill>
+                        <a:srgbClr val="E5E7EB"/>
+                      </a:solidFill>
+                      <a:prstDash val="solid"/>
+                      <a:round/>
+                      <a:headEnd type="none" w="med" len="med"/>
+                      <a:tailEnd type="none" w="med" len="med"/>
+                    </a:lnR>
+                    <a:lnT w="6350" cap="flat" cmpd="sng" algn="ctr">
+                      <a:solidFill>
+                        <a:srgbClr val="E5E7EB"/>
+                      </a:solidFill>
+                      <a:prstDash val="solid"/>
+                      <a:round/>
+                      <a:headEnd type="none" w="med" len="med"/>
+                      <a:tailEnd type="none" w="med" len="med"/>
+                    </a:lnT>
+                    <a:lnB w="6350" cap="flat" cmpd="sng" algn="ctr">
+                      <a:solidFill>
+                        <a:srgbClr val="E5E7EB"/>
+                      </a:solidFill>
+                      <a:prstDash val="solid"/>
+                      <a:round/>
+                      <a:headEnd type="none" w="med" len="med"/>
+                      <a:tailEnd type="none" w="med" len="med"/>
+                    </a:lnB>
+                  </a:tcPr>
+                </a:tc>
+                <a:tc>
+                  <a:txBody>
+                    <a:bodyPr/>
+                    <a:lstStyle/>
+                    <a:p>
+                      <a:pPr indent="0" marL="0">
+                        <a:buNone/>
+                      </a:pPr>
+                      <a:r>
+                        <a:rPr lang="en-US" sz="1100" dirty="0">
+                          <a:solidFill>
+                            <a:srgbClr val="374151"/>
+                          </a:solidFill>
+                          <a:latin typeface="Apple SD Gothic Neo" pitchFamily="34" charset="0"/>
+                          <a:ea typeface="Apple SD Gothic Neo" pitchFamily="34" charset="-122"/>
+                          <a:cs typeface="Apple SD Gothic Neo" pitchFamily="34" charset="-120"/>
+                        </a:rPr>
+                        <a:t>오류 발생</a:t>
+                      </a:r>
+                      <a:endParaRPr lang="en-US" sz="1100" dirty="0">
+                        <a:latin typeface="Apple SD Gothic Neo" charset="0"/>
+                        <a:ea typeface="Apple SD Gothic Neo" charset="0"/>
+                        <a:cs typeface="Apple SD Gothic Neo" charset="0"/>
+                      </a:endParaRPr>
+                    </a:p>
+                  </a:txBody>
+                  <a:tcPr marL="91440" marR="91440" marT="45720" marB="45720">
+                    <a:lnL w="6350" cap="flat" cmpd="sng" algn="ctr">
+                      <a:solidFill>
+                        <a:srgbClr val="E5E7EB"/>
+                      </a:solidFill>
+                      <a:prstDash val="solid"/>
+                      <a:round/>
+                      <a:headEnd type="none" w="med" len="med"/>
+                      <a:tailEnd type="none" w="med" len="med"/>
+                    </a:lnL>
+                    <a:lnR w="6350" cap="flat" cmpd="sng" algn="ctr">
+                      <a:solidFill>
+                        <a:srgbClr val="E5E7EB"/>
+                      </a:solidFill>
+                      <a:prstDash val="solid"/>
+                      <a:round/>
+                      <a:headEnd type="none" w="med" len="med"/>
+                      <a:tailEnd type="none" w="med" len="med"/>
+                    </a:lnR>
+                    <a:lnT w="6350" cap="flat" cmpd="sng" algn="ctr">
+                      <a:solidFill>
+                        <a:srgbClr val="E5E7EB"/>
+                      </a:solidFill>
+                      <a:prstDash val="solid"/>
+                      <a:round/>
+                      <a:headEnd type="none" w="med" len="med"/>
+                      <a:tailEnd type="none" w="med" len="med"/>
+                    </a:lnT>
+                    <a:lnB w="6350" cap="flat" cmpd="sng" algn="ctr">
+                      <a:solidFill>
+                        <a:srgbClr val="E5E7EB"/>
+                      </a:solidFill>
+                      <a:prstDash val="solid"/>
+                      <a:round/>
+                      <a:headEnd type="none" w="med" len="med"/>
+                      <a:tailEnd type="none" w="med" len="med"/>
+                    </a:lnB>
+                  </a:tcPr>
+                </a:tc>
+              </a:tr>
+            </a:tbl>
+          </a:graphicData>
+        </a:graphic>
+      </p:graphicFrame>
+      <p:sp>
+        <p:nvSpPr>
+          <p:cNvPr id="25" name="Slide Number Placeholder 0"/>
+          <p:cNvSpPr>
+            <a:spLocks noGrp="1"/>
+          </p:cNvSpPr>
+          <p:nvPr>
+            <p:ph type="sldNum" sz="quarter" idx="4294967295"/>
+          </p:nvPr>
+        </p:nvSpPr>
+        <p:spPr>
+          <a:xfrm>
+            <a:off x="8686800" y="4937760"/>
+            <a:ext cx="800000" cy="300000"/>
+          </a:xfrm>
+          <a:prstGeom prst="rect">
+            <a:avLst/>
+          </a:prstGeom>
+          <a:extLst>
+            <a:ext uri="{C572A759-6A51-4108-AA02-DFA0A04FC94B}">
+              <ma14:wrappingTextBoxFlag xmlns:ma14="http://schemas.microsoft.com/office/mac/drawingml/2011/main" val="0"/>
+            </a:ext>
+          </a:extLst>
+        </p:spPr>
+        <p:txBody>
+          <a:bodyPr/>
+          <a:lstStyle>
+            <a:lvl1pPr>
+              <a:defRPr sz="1000">
+                <a:solidFill>
+                  <a:srgbClr val="FFFFFF"/>
+                </a:solidFill>
+              </a:defRPr>
+            </a:lvl1pPr>
+          </a:lstStyle>
+          <a:p>
+            <a:pPr algn="l"/>
+            <a:fld id="{F7021451-1387-4CA6-816F-3879F97B5CBC}" type="slidenum">
+              <a:rPr b="0" lang="en-US"/>
+              <a:t>10</a:t>
+            </a:fld>
+            <a:endParaRPr lang="en-US"/>
+          </a:p>
+        </p:txBody>
+      </p:sp>
+    </p:spTree>
+  </p:cSld>
+  <p:clrMapOvr>
+    <a:masterClrMapping/>
+  </p:clrMapOvr>
+</p:sld>
+</file>
+
+<file path=ppt/slides/slide11.xml><?xml version="1.0" encoding="utf-8"?>
+<p:sld xmlns:a="http://schemas.openxmlformats.org/drawingml/2006/main" xmlns:r="http://schemas.openxmlformats.org/officeDocument/2006/relationships" xmlns:p="http://schemas.openxmlformats.org/presentationml/2006/main">
+  <p:cSld name="Slide 11">
+    <p:spTree>
+      <p:nvGrpSpPr>
+        <p:cNvPr id="1" name=""/>
+        <p:cNvGrpSpPr/>
+        <p:nvPr/>
+      </p:nvGrpSpPr>
+      <p:grpSpPr>
+        <a:xfrm>
+          <a:off x="0" y="0"/>
+          <a:ext cx="0" cy="0"/>
+          <a:chOff x="0" y="0"/>
+          <a:chExt cx="0" cy="0"/>
+        </a:xfrm>
+      </p:grpSpPr>
+      <p:sp>
+        <p:nvSpPr>
+          <p:cNvPr id="2" name="Text 0"/>
+          <p:cNvSpPr/>
+          <p:nvPr/>
+        </p:nvSpPr>
+        <p:spPr>
+          <a:xfrm>
+            <a:off x="457200" y="274320"/>
+            <a:ext cx="8229600" cy="0"/>
+          </a:xfrm>
+          <a:prstGeom prst="rect">
+            <a:avLst/>
+          </a:prstGeom>
+          <a:noFill/>
+          <a:ln/>
+        </p:spPr>
+        <p:txBody>
+          <a:bodyPr wrap="square" rtlCol="0" anchor="ctr"/>
+          <a:lstStyle/>
+          <a:p>
+            <a:pPr indent="0" marL="0">
+              <a:buNone/>
+            </a:pPr>
+            <a:r>
+              <a:rPr lang="en-US" sz="2800" b="1" dirty="0">
+                <a:solidFill>
+                  <a:srgbClr val="1E40AF"/>
+                </a:solidFill>
+              </a:rPr>
+              <a:t>문제 해결</a:t>
+            </a:r>
+            <a:endParaRPr lang="en-US" sz="2800" dirty="0"/>
+          </a:p>
+        </p:txBody>
+      </p:sp>
+      <p:sp>
+        <p:nvSpPr>
+          <p:cNvPr id="3" name="Text 1"/>
+          <p:cNvSpPr/>
+          <p:nvPr/>
+        </p:nvSpPr>
+        <p:spPr>
+          <a:xfrm>
+            <a:off x="640080" y="914400"/>
+            <a:ext cx="7772400" cy="0"/>
+          </a:xfrm>
+          <a:prstGeom prst="rect">
+            <a:avLst/>
+          </a:prstGeom>
+          <a:noFill/>
+          <a:ln/>
+        </p:spPr>
+        <p:txBody>
+          <a:bodyPr wrap="square" rtlCol="0" anchor="ctr"/>
+          <a:lstStyle/>
+          <a:p>
+            <a:r>
+              <a:rPr lang="en-US" sz="1400" dirty="0">
+                <a:solidFill>
+                  <a:srgbClr val="374151"/>
+                </a:solidFill>
+              </a:rPr>
+              <a:t>설치 옵션이 안 나타남:</a:t>
+            </a:r>
+            <a:endParaRPr lang="en-US" sz="1400" dirty="0"/>
+          </a:p>
+        </p:txBody>
+      </p:sp>
+      <p:sp>
+        <p:nvSpPr>
+          <p:cNvPr id="4" name="Text 2"/>
+          <p:cNvSpPr/>
+          <p:nvPr/>
+        </p:nvSpPr>
+        <p:spPr>
+          <a:xfrm>
+            <a:off x="640080" y="1280160"/>
+            <a:ext cx="7772400" cy="0"/>
+          </a:xfrm>
+          <a:prstGeom prst="rect">
+            <a:avLst/>
+          </a:prstGeom>
+          <a:noFill/>
+          <a:ln/>
+        </p:spPr>
+        <p:txBody>
+          <a:bodyPr wrap="square" rtlCol="0" anchor="ctr"/>
+          <a:lstStyle/>
+          <a:p>
+            <a:r>
+              <a:rPr lang="en-US" sz="1400" dirty="0">
+                <a:solidFill>
+                  <a:srgbClr val="374151"/>
+                </a:solidFill>
+              </a:rPr>
+              <a:t>  - iOS: Safari 브라우저 사용 확인</a:t>
+            </a:r>
+            <a:endParaRPr lang="en-US" sz="1400" dirty="0"/>
+          </a:p>
+        </p:txBody>
+      </p:sp>
+      <p:sp>
+        <p:nvSpPr>
+          <p:cNvPr id="5" name="Text 3"/>
+          <p:cNvSpPr/>
+          <p:nvPr/>
+        </p:nvSpPr>
+        <p:spPr>
+          <a:xfrm>
+            <a:off x="640080" y="1645920"/>
+            <a:ext cx="7772400" cy="0"/>
+          </a:xfrm>
+          <a:prstGeom prst="rect">
+            <a:avLst/>
+          </a:prstGeom>
+          <a:noFill/>
+          <a:ln/>
+        </p:spPr>
+        <p:txBody>
+          <a:bodyPr wrap="square" rtlCol="0" anchor="ctr"/>
+          <a:lstStyle/>
+          <a:p>
+            <a:r>
+              <a:rPr lang="en-US" sz="1400" dirty="0">
+                <a:solidFill>
+                  <a:srgbClr val="374151"/>
+                </a:solidFill>
+              </a:rPr>
+              <a:t>  - Android: HTTPS 연결 확인</a:t>
+            </a:r>
+            <a:endParaRPr lang="en-US" sz="1400" dirty="0"/>
+          </a:p>
+        </p:txBody>
+      </p:sp>
+      <p:sp>
+        <p:nvSpPr>
+          <p:cNvPr id="6" name="Text 4"/>
+          <p:cNvSpPr/>
+          <p:nvPr/>
+        </p:nvSpPr>
+        <p:spPr>
+          <a:xfrm>
+            <a:off x="640080" y="2011680"/>
+            <a:ext cx="7772400" cy="0"/>
+          </a:xfrm>
+          <a:prstGeom prst="rect">
+            <a:avLst/>
+          </a:prstGeom>
+          <a:noFill/>
+          <a:ln/>
+        </p:spPr>
+        <p:txBody>
+          <a:bodyPr wrap="square" rtlCol="0" anchor="ctr"/>
+          <a:lstStyle/>
+          <a:p>
+            <a:endParaRPr lang="en-US" sz="1400" dirty="0"/>
+          </a:p>
+        </p:txBody>
+      </p:sp>
+      <p:sp>
+        <p:nvSpPr>
+          <p:cNvPr id="7" name="Text 5"/>
+          <p:cNvSpPr/>
+          <p:nvPr/>
+        </p:nvSpPr>
+        <p:spPr>
+          <a:xfrm>
+            <a:off x="640080" y="2377440"/>
+            <a:ext cx="7772400" cy="0"/>
+          </a:xfrm>
+          <a:prstGeom prst="rect">
+            <a:avLst/>
+          </a:prstGeom>
+          <a:noFill/>
+          <a:ln/>
+        </p:spPr>
+        <p:txBody>
+          <a:bodyPr wrap="square" rtlCol="0" anchor="ctr"/>
+          <a:lstStyle/>
+          <a:p>
+            <a:r>
+              <a:rPr lang="en-US" sz="1400" dirty="0">
+                <a:solidFill>
+                  <a:srgbClr val="374151"/>
+                </a:solidFill>
+              </a:rPr>
+              <a:t>오프라인에서 작동 안 함:</a:t>
+            </a:r>
+            <a:endParaRPr lang="en-US" sz="1400" dirty="0"/>
+          </a:p>
+        </p:txBody>
+      </p:sp>
+      <p:sp>
+        <p:nvSpPr>
+          <p:cNvPr id="8" name="Text 6"/>
+          <p:cNvSpPr/>
+          <p:nvPr/>
+        </p:nvSpPr>
+        <p:spPr>
+          <a:xfrm>
+            <a:off x="640080" y="2743200"/>
+            <a:ext cx="7772400" cy="0"/>
+          </a:xfrm>
+          <a:prstGeom prst="rect">
+            <a:avLst/>
+          </a:prstGeom>
+          <a:noFill/>
+          <a:ln/>
+        </p:spPr>
+        <p:txBody>
+          <a:bodyPr wrap="square" rtlCol="0" anchor="ctr"/>
+          <a:lstStyle/>
+          <a:p>
+            <a:r>
+              <a:rPr lang="en-US" sz="1400" dirty="0">
+                <a:solidFill>
+                  <a:srgbClr val="374151"/>
+                </a:solidFill>
+              </a:rPr>
+              <a:t>  - 해당 페이지를 온라인에서 한 번 방문 필요</a:t>
+            </a:r>
+            <a:endParaRPr lang="en-US" sz="1400" dirty="0"/>
+          </a:p>
+        </p:txBody>
+      </p:sp>
+      <p:sp>
+        <p:nvSpPr>
+          <p:cNvPr id="9" name="Text 7"/>
+          <p:cNvSpPr/>
+          <p:nvPr/>
+        </p:nvSpPr>
+        <p:spPr>
+          <a:xfrm>
+            <a:off x="640080" y="3108960"/>
+            <a:ext cx="7772400" cy="0"/>
+          </a:xfrm>
+          <a:prstGeom prst="rect">
+            <a:avLst/>
+          </a:prstGeom>
+          <a:noFill/>
+          <a:ln/>
+        </p:spPr>
+        <p:txBody>
+          <a:bodyPr wrap="square" rtlCol="0" anchor="ctr"/>
+          <a:lstStyle/>
+          <a:p>
+            <a:endParaRPr lang="en-US" sz="1400" dirty="0"/>
+          </a:p>
+        </p:txBody>
+      </p:sp>
+      <p:sp>
+        <p:nvSpPr>
+          <p:cNvPr id="10" name="Text 8"/>
+          <p:cNvSpPr/>
+          <p:nvPr/>
+        </p:nvSpPr>
+        <p:spPr>
+          <a:xfrm>
+            <a:off x="640080" y="3474720"/>
+            <a:ext cx="7772400" cy="0"/>
+          </a:xfrm>
+          <a:prstGeom prst="rect">
+            <a:avLst/>
+          </a:prstGeom>
+          <a:noFill/>
+          <a:ln/>
+        </p:spPr>
+        <p:txBody>
+          <a:bodyPr wrap="square" rtlCol="0" anchor="ctr"/>
+          <a:lstStyle/>
+          <a:p>
+            <a:r>
+              <a:rPr lang="en-US" sz="1400" dirty="0">
+                <a:solidFill>
+                  <a:srgbClr val="374151"/>
+                </a:solidFill>
+              </a:rPr>
+              <a:t>동기화가 안 됨:</a:t>
+            </a:r>
+            <a:endParaRPr lang="en-US" sz="1400" dirty="0"/>
+          </a:p>
+        </p:txBody>
+      </p:sp>
+      <p:sp>
+        <p:nvSpPr>
+          <p:cNvPr id="11" name="Text 9"/>
+          <p:cNvSpPr/>
+          <p:nvPr/>
+        </p:nvSpPr>
+        <p:spPr>
+          <a:xfrm>
+            <a:off x="640080" y="3840480"/>
+            <a:ext cx="7772400" cy="0"/>
+          </a:xfrm>
+          <a:prstGeom prst="rect">
+            <a:avLst/>
+          </a:prstGeom>
+          <a:noFill/>
+          <a:ln/>
+        </p:spPr>
+        <p:txBody>
+          <a:bodyPr wrap="square" rtlCol="0" anchor="ctr"/>
+          <a:lstStyle/>
+          <a:p>
+            <a:r>
+              <a:rPr lang="en-US" sz="1400" dirty="0">
+                <a:solidFill>
+                  <a:srgbClr val="374151"/>
+                </a:solidFill>
+              </a:rPr>
+              <a:t>  - "지금 동기화" 버튼 클릭 또는 페이지 새로고침</a:t>
+            </a:r>
+            <a:endParaRPr lang="en-US" sz="1400" dirty="0"/>
+          </a:p>
+        </p:txBody>
+      </p:sp>
+      <p:sp>
+        <p:nvSpPr>
+          <p:cNvPr id="25" name="Slide Number Placeholder 0"/>
+          <p:cNvSpPr>
+            <a:spLocks noGrp="1"/>
+          </p:cNvSpPr>
+          <p:nvPr>
+            <p:ph type="sldNum" sz="quarter" idx="4294967295"/>
+          </p:nvPr>
+        </p:nvSpPr>
+        <p:spPr>
+          <a:xfrm>
+            <a:off x="8686800" y="4937760"/>
+            <a:ext cx="800000" cy="300000"/>
+          </a:xfrm>
+          <a:prstGeom prst="rect">
+            <a:avLst/>
+          </a:prstGeom>
+          <a:extLst>
+            <a:ext uri="{C572A759-6A51-4108-AA02-DFA0A04FC94B}">
+              <ma14:wrappingTextBoxFlag xmlns:ma14="http://schemas.microsoft.com/office/mac/drawingml/2011/main" val="0"/>
+            </a:ext>
+          </a:extLst>
+        </p:spPr>
+        <p:txBody>
+          <a:bodyPr/>
+          <a:lstStyle>
+            <a:lvl1pPr>
+              <a:defRPr sz="1000">
+                <a:solidFill>
+                  <a:srgbClr val="FFFFFF"/>
+                </a:solidFill>
+              </a:defRPr>
+            </a:lvl1pPr>
+          </a:lstStyle>
+          <a:p>
+            <a:pPr algn="l"/>
+            <a:fld id="{F7021451-1387-4CA6-816F-3879F97B5CBC}" type="slidenum">
+              <a:rPr b="0" lang="en-US"/>
+              <a:t>11</a:t>
+            </a:fld>
+            <a:endParaRPr lang="en-US"/>
+          </a:p>
+        </p:txBody>
+      </p:sp>
+    </p:spTree>
+  </p:cSld>
+  <p:clrMapOvr>
+    <a:masterClrMapping/>
+  </p:clrMapOvr>
+</p:sld>
+</file>
+
+<file path=ppt/slides/slide12.xml><?xml version="1.0" encoding="utf-8"?>
+<p:sld xmlns:a="http://schemas.openxmlformats.org/drawingml/2006/main" xmlns:r="http://schemas.openxmlformats.org/officeDocument/2006/relationships" xmlns:p="http://schemas.openxmlformats.org/presentationml/2006/main">
+  <p:cSld name="Slide 12">
+    <p:spTree>
+      <p:nvGrpSpPr>
+        <p:cNvPr id="1" name=""/>
+        <p:cNvGrpSpPr/>
+        <p:nvPr/>
+      </p:nvGrpSpPr>
+      <p:grpSpPr>
+        <a:xfrm>
+          <a:off x="0" y="0"/>
+          <a:ext cx="0" cy="0"/>
+          <a:chOff x="0" y="0"/>
+          <a:chExt cx="0" cy="0"/>
+        </a:xfrm>
+      </p:grpSpPr>
+      <p:sp>
+        <p:nvSpPr>
+          <p:cNvPr id="2" name="Text 0"/>
+          <p:cNvSpPr/>
+          <p:nvPr/>
+        </p:nvSpPr>
+        <p:spPr>
+          <a:xfrm>
             <a:off x="457200" y="2057400"/>
             <a:ext cx="8229600" cy="914400"/>
           </a:xfrm>
@@ -4590,16 +6286,39 @@
           </a:p>
         </p:txBody>
       </p:sp>
-      <p:sp>
-        <p:nvSpPr>
-          <p:cNvPr id="3" name="Text 1"/>
+      <p:pic>
+        <p:nvPicPr>
+          <p:cNvPr id="3" name="Image 0" descr="/Users/wandosea/Documents/GitHub/expense-system/docs/user-guide/screenshots/offline-banner.png">    </p:cNvPr>
+          <p:cNvPicPr>
+            <a:picLocks noChangeAspect="1"/>
+          </p:cNvPicPr>
+          <p:nvPr/>
+        </p:nvPicPr>
+        <p:blipFill>
+          <a:blip r:embed="rId1"/>
+          <a:srcRect l="0" r="0" t="0" b="0"/>
+          <a:stretch/>
+        </p:blipFill>
+        <p:spPr>
+          <a:xfrm>
+            <a:off x="457200" y="914400"/>
+            <a:ext cx="8229600" cy="3657600"/>
+          </a:xfrm>
+          <a:prstGeom prst="rect">
+            <a:avLst/>
+          </a:prstGeom>
+        </p:spPr>
+      </p:pic>
+      <p:sp>
+        <p:nvSpPr>
+          <p:cNvPr id="4" name="Text 1"/>
           <p:cNvSpPr/>
           <p:nvPr/>
         </p:nvSpPr>
         <p:spPr>
           <a:xfrm>
-            <a:off x="640080" y="914400"/>
-            <a:ext cx="7772400" cy="0"/>
+            <a:off x="457200" y="4754880"/>
+            <a:ext cx="8229600" cy="0"/>
           </a:xfrm>
           <a:prstGeom prst="rect">
             <a:avLst/>
@@ -4611,81 +6330,18 @@
           <a:bodyPr wrap="square" rtlCol="0" anchor="ctr"/>
           <a:lstStyle/>
           <a:p>
+            <a:pPr indent="0" marL="0">
+              <a:buNone/>
+            </a:pPr>
             <a:r>
-              <a:rPr lang="en-US" sz="1400" dirty="0">
+              <a:rPr lang="en-US" sz="1200" dirty="0">
                 <a:solidFill>
-                  <a:srgbClr val="374151"/>
+                  <a:srgbClr val="6B7280"/>
                 </a:solidFill>
               </a:rPr>
-              <a:t>인터넷 연결이 끊어지면 화면 상단에 노란색 배너 표시</a:t>
+              <a:t>화면 상단에 노란색 배너 표시</a:t>
             </a:r>
-            <a:endParaRPr lang="en-US" sz="1400" dirty="0"/>
-          </a:p>
-        </p:txBody>
-      </p:sp>
-      <p:sp>
-        <p:nvSpPr>
-          <p:cNvPr id="4" name="Text 2"/>
-          <p:cNvSpPr/>
-          <p:nvPr/>
-        </p:nvSpPr>
-        <p:spPr>
-          <a:xfrm>
-            <a:off x="640080" y="1280160"/>
-            <a:ext cx="7772400" cy="0"/>
-          </a:xfrm>
-          <a:prstGeom prst="rect">
-            <a:avLst/>
-          </a:prstGeom>
-          <a:noFill/>
-          <a:ln/>
-        </p:spPr>
-        <p:txBody>
-          <a:bodyPr wrap="square" rtlCol="0" anchor="ctr"/>
-          <a:lstStyle/>
-          <a:p>
-            <a:r>
-              <a:rPr lang="en-US" sz="1400" dirty="0">
-                <a:solidFill>
-                  <a:srgbClr val="374151"/>
-                </a:solidFill>
-              </a:rPr>
-              <a:t>"오프라인 상태입니다. 작성한 내용은 자동으로 저장됩니다."</a:t>
-            </a:r>
-            <a:endParaRPr lang="en-US" sz="1400" dirty="0"/>
-          </a:p>
-        </p:txBody>
-      </p:sp>
-      <p:sp>
-        <p:nvSpPr>
-          <p:cNvPr id="5" name="Text 3"/>
-          <p:cNvSpPr/>
-          <p:nvPr/>
-        </p:nvSpPr>
-        <p:spPr>
-          <a:xfrm>
-            <a:off x="640080" y="1645920"/>
-            <a:ext cx="7772400" cy="0"/>
-          </a:xfrm>
-          <a:prstGeom prst="rect">
-            <a:avLst/>
-          </a:prstGeom>
-          <a:noFill/>
-          <a:ln/>
-        </p:spPr>
-        <p:txBody>
-          <a:bodyPr wrap="square" rtlCol="0" anchor="ctr"/>
-          <a:lstStyle/>
-          <a:p>
-            <a:r>
-              <a:rPr lang="en-US" sz="1400" dirty="0">
-                <a:solidFill>
-                  <a:srgbClr val="374151"/>
-                </a:solidFill>
-              </a:rPr>
-              <a:t>데이터는 브라우저 IndexedDB에 자동 저장</a:t>
-            </a:r>
-            <a:endParaRPr lang="en-US" sz="1400" dirty="0"/>
+            <a:endParaRPr lang="en-US" sz="1200" dirty="0"/>
           </a:p>
         </p:txBody>
       </p:sp>
@@ -4789,1037 +6445,111 @@
                   <a:srgbClr val="1E40AF"/>
                 </a:solidFill>
               </a:rPr>
-              <a:t>백그라운드 동기화 - 상태 표시</a:t>
+              <a:t>오프라인 상태에서의 동작</a:t>
             </a:r>
             <a:endParaRPr lang="en-US" sz="2800" dirty="0"/>
           </a:p>
         </p:txBody>
       </p:sp>
-      <p:graphicFrame>
-        <p:nvGraphicFramePr>
-          <p:cNvPr id="9" name="Table 0"/>
-          <p:cNvGraphicFramePr>
-            <a:graphicFrameLocks noGrp="1"/>
-          </p:cNvGraphicFramePr>
-          <p:nvPr>
-            <p:extLst>
-              <p:ext uri="{D42A27DB-BD31-4B8C-83A1-F6EECF244321}">
-                <p14:modId xmlns:p14="http://schemas.microsoft.com/office/powerpoint/2010/main" val="1579011935"/>
-              </p:ext>
-            </p:extLst>
-          </p:nvPr>
-        </p:nvGraphicFramePr>
-        <p:xfrm>
-          <a:off x="457200" y="914400"/>
-          <a:ext cx="8229600" cy="914400"/>
-        </p:xfrm>
-        <a:graphic>
-          <a:graphicData uri="http://schemas.openxmlformats.org/drawingml/2006/table">
-            <a:tbl>
-              <a:tblPr/>
-              <a:tblGrid>
-                <a:gridCol w="2743200"/>
-                <a:gridCol w="2743200"/>
-                <a:gridCol w="2743200"/>
-              </a:tblGrid>
-              <a:tr h="0">
-                <a:tc>
-                  <a:txBody>
-                    <a:bodyPr/>
-                    <a:lstStyle/>
-                    <a:p>
-                      <a:pPr indent="0" marL="0">
-                        <a:buNone/>
-                      </a:pPr>
-                      <a:r>
-                        <a:rPr lang="en-US" sz="1200" b="1" dirty="0">
-                          <a:solidFill>
-                            <a:srgbClr val="FFFFFF"/>
-                          </a:solidFill>
-                          <a:latin typeface="Apple SD Gothic Neo" pitchFamily="34" charset="0"/>
-                          <a:ea typeface="Apple SD Gothic Neo" pitchFamily="34" charset="-122"/>
-                          <a:cs typeface="Apple SD Gothic Neo" pitchFamily="34" charset="-120"/>
-                        </a:rPr>
-                        <a:t>상태</a:t>
-                      </a:r>
-                      <a:endParaRPr lang="en-US" sz="1200" dirty="0">
-                        <a:latin typeface="Apple SD Gothic Neo" charset="0"/>
-                        <a:ea typeface="Apple SD Gothic Neo" charset="0"/>
-                        <a:cs typeface="Apple SD Gothic Neo" charset="0"/>
-                      </a:endParaRPr>
-                    </a:p>
-                  </a:txBody>
-                  <a:tcPr marL="91440" marR="91440" marT="45720" marB="45720">
-                    <a:lnL w="6350" cap="flat" cmpd="sng" algn="ctr">
-                      <a:solidFill>
-                        <a:srgbClr val="E5E7EB"/>
-                      </a:solidFill>
-                      <a:prstDash val="solid"/>
-                      <a:round/>
-                      <a:headEnd type="none" w="med" len="med"/>
-                      <a:tailEnd type="none" w="med" len="med"/>
-                    </a:lnL>
-                    <a:lnR w="6350" cap="flat" cmpd="sng" algn="ctr">
-                      <a:solidFill>
-                        <a:srgbClr val="E5E7EB"/>
-                      </a:solidFill>
-                      <a:prstDash val="solid"/>
-                      <a:round/>
-                      <a:headEnd type="none" w="med" len="med"/>
-                      <a:tailEnd type="none" w="med" len="med"/>
-                    </a:lnR>
-                    <a:lnT w="6350" cap="flat" cmpd="sng" algn="ctr">
-                      <a:solidFill>
-                        <a:srgbClr val="E5E7EB"/>
-                      </a:solidFill>
-                      <a:prstDash val="solid"/>
-                      <a:round/>
-                      <a:headEnd type="none" w="med" len="med"/>
-                      <a:tailEnd type="none" w="med" len="med"/>
-                    </a:lnT>
-                    <a:lnB w="6350" cap="flat" cmpd="sng" algn="ctr">
-                      <a:solidFill>
-                        <a:srgbClr val="E5E7EB"/>
-                      </a:solidFill>
-                      <a:prstDash val="solid"/>
-                      <a:round/>
-                      <a:headEnd type="none" w="med" len="med"/>
-                      <a:tailEnd type="none" w="med" len="med"/>
-                    </a:lnB>
-                    <a:solidFill>
-                      <a:srgbClr val="3B82F6"/>
-                    </a:solidFill>
-                  </a:tcPr>
-                </a:tc>
-                <a:tc>
-                  <a:txBody>
-                    <a:bodyPr/>
-                    <a:lstStyle/>
-                    <a:p>
-                      <a:pPr indent="0" marL="0">
-                        <a:buNone/>
-                      </a:pPr>
-                      <a:r>
-                        <a:rPr lang="en-US" sz="1200" b="1" dirty="0">
-                          <a:solidFill>
-                            <a:srgbClr val="FFFFFF"/>
-                          </a:solidFill>
-                          <a:latin typeface="Apple SD Gothic Neo" pitchFamily="34" charset="0"/>
-                          <a:ea typeface="Apple SD Gothic Neo" pitchFamily="34" charset="-122"/>
-                          <a:cs typeface="Apple SD Gothic Neo" pitchFamily="34" charset="-120"/>
-                        </a:rPr>
-                        <a:t>배너 색상</a:t>
-                      </a:r>
-                      <a:endParaRPr lang="en-US" sz="1200" dirty="0">
-                        <a:latin typeface="Apple SD Gothic Neo" charset="0"/>
-                        <a:ea typeface="Apple SD Gothic Neo" charset="0"/>
-                        <a:cs typeface="Apple SD Gothic Neo" charset="0"/>
-                      </a:endParaRPr>
-                    </a:p>
-                  </a:txBody>
-                  <a:tcPr marL="91440" marR="91440" marT="45720" marB="45720">
-                    <a:lnL w="6350" cap="flat" cmpd="sng" algn="ctr">
-                      <a:solidFill>
-                        <a:srgbClr val="E5E7EB"/>
-                      </a:solidFill>
-                      <a:prstDash val="solid"/>
-                      <a:round/>
-                      <a:headEnd type="none" w="med" len="med"/>
-                      <a:tailEnd type="none" w="med" len="med"/>
-                    </a:lnL>
-                    <a:lnR w="6350" cap="flat" cmpd="sng" algn="ctr">
-                      <a:solidFill>
-                        <a:srgbClr val="E5E7EB"/>
-                      </a:solidFill>
-                      <a:prstDash val="solid"/>
-                      <a:round/>
-                      <a:headEnd type="none" w="med" len="med"/>
-                      <a:tailEnd type="none" w="med" len="med"/>
-                    </a:lnR>
-                    <a:lnT w="6350" cap="flat" cmpd="sng" algn="ctr">
-                      <a:solidFill>
-                        <a:srgbClr val="E5E7EB"/>
-                      </a:solidFill>
-                      <a:prstDash val="solid"/>
-                      <a:round/>
-                      <a:headEnd type="none" w="med" len="med"/>
-                      <a:tailEnd type="none" w="med" len="med"/>
-                    </a:lnT>
-                    <a:lnB w="6350" cap="flat" cmpd="sng" algn="ctr">
-                      <a:solidFill>
-                        <a:srgbClr val="E5E7EB"/>
-                      </a:solidFill>
-                      <a:prstDash val="solid"/>
-                      <a:round/>
-                      <a:headEnd type="none" w="med" len="med"/>
-                      <a:tailEnd type="none" w="med" len="med"/>
-                    </a:lnB>
-                    <a:solidFill>
-                      <a:srgbClr val="3B82F6"/>
-                    </a:solidFill>
-                  </a:tcPr>
-                </a:tc>
-                <a:tc>
-                  <a:txBody>
-                    <a:bodyPr/>
-                    <a:lstStyle/>
-                    <a:p>
-                      <a:pPr indent="0" marL="0">
-                        <a:buNone/>
-                      </a:pPr>
-                      <a:r>
-                        <a:rPr lang="en-US" sz="1200" b="1" dirty="0">
-                          <a:solidFill>
-                            <a:srgbClr val="FFFFFF"/>
-                          </a:solidFill>
-                          <a:latin typeface="Apple SD Gothic Neo" pitchFamily="34" charset="0"/>
-                          <a:ea typeface="Apple SD Gothic Neo" pitchFamily="34" charset="-122"/>
-                          <a:cs typeface="Apple SD Gothic Neo" pitchFamily="34" charset="-120"/>
-                        </a:rPr>
-                        <a:t>설명</a:t>
-                      </a:r>
-                      <a:endParaRPr lang="en-US" sz="1200" dirty="0">
-                        <a:latin typeface="Apple SD Gothic Neo" charset="0"/>
-                        <a:ea typeface="Apple SD Gothic Neo" charset="0"/>
-                        <a:cs typeface="Apple SD Gothic Neo" charset="0"/>
-                      </a:endParaRPr>
-                    </a:p>
-                  </a:txBody>
-                  <a:tcPr marL="91440" marR="91440" marT="45720" marB="45720">
-                    <a:lnL w="6350" cap="flat" cmpd="sng" algn="ctr">
-                      <a:solidFill>
-                        <a:srgbClr val="E5E7EB"/>
-                      </a:solidFill>
-                      <a:prstDash val="solid"/>
-                      <a:round/>
-                      <a:headEnd type="none" w="med" len="med"/>
-                      <a:tailEnd type="none" w="med" len="med"/>
-                    </a:lnL>
-                    <a:lnR w="6350" cap="flat" cmpd="sng" algn="ctr">
-                      <a:solidFill>
-                        <a:srgbClr val="E5E7EB"/>
-                      </a:solidFill>
-                      <a:prstDash val="solid"/>
-                      <a:round/>
-                      <a:headEnd type="none" w="med" len="med"/>
-                      <a:tailEnd type="none" w="med" len="med"/>
-                    </a:lnR>
-                    <a:lnT w="6350" cap="flat" cmpd="sng" algn="ctr">
-                      <a:solidFill>
-                        <a:srgbClr val="E5E7EB"/>
-                      </a:solidFill>
-                      <a:prstDash val="solid"/>
-                      <a:round/>
-                      <a:headEnd type="none" w="med" len="med"/>
-                      <a:tailEnd type="none" w="med" len="med"/>
-                    </a:lnT>
-                    <a:lnB w="6350" cap="flat" cmpd="sng" algn="ctr">
-                      <a:solidFill>
-                        <a:srgbClr val="E5E7EB"/>
-                      </a:solidFill>
-                      <a:prstDash val="solid"/>
-                      <a:round/>
-                      <a:headEnd type="none" w="med" len="med"/>
-                      <a:tailEnd type="none" w="med" len="med"/>
-                    </a:lnB>
-                    <a:solidFill>
-                      <a:srgbClr val="3B82F6"/>
-                    </a:solidFill>
-                  </a:tcPr>
-                </a:tc>
-              </a:tr>
-              <a:tr h="0">
-                <a:tc>
-                  <a:txBody>
-                    <a:bodyPr/>
-                    <a:lstStyle/>
-                    <a:p>
-                      <a:pPr indent="0" marL="0">
-                        <a:buNone/>
-                      </a:pPr>
-                      <a:r>
-                        <a:rPr lang="en-US" sz="1100" dirty="0">
-                          <a:solidFill>
-                            <a:srgbClr val="374151"/>
-                          </a:solidFill>
-                          <a:latin typeface="Apple SD Gothic Neo" pitchFamily="34" charset="0"/>
-                          <a:ea typeface="Apple SD Gothic Neo" pitchFamily="34" charset="-122"/>
-                          <a:cs typeface="Apple SD Gothic Neo" pitchFamily="34" charset="-120"/>
-                        </a:rPr>
-                        <a:t>오프라인</a:t>
-                      </a:r>
-                      <a:endParaRPr lang="en-US" sz="1100" dirty="0">
-                        <a:latin typeface="Apple SD Gothic Neo" charset="0"/>
-                        <a:ea typeface="Apple SD Gothic Neo" charset="0"/>
-                        <a:cs typeface="Apple SD Gothic Neo" charset="0"/>
-                      </a:endParaRPr>
-                    </a:p>
-                  </a:txBody>
-                  <a:tcPr marL="91440" marR="91440" marT="45720" marB="45720">
-                    <a:lnL w="6350" cap="flat" cmpd="sng" algn="ctr">
-                      <a:solidFill>
-                        <a:srgbClr val="E5E7EB"/>
-                      </a:solidFill>
-                      <a:prstDash val="solid"/>
-                      <a:round/>
-                      <a:headEnd type="none" w="med" len="med"/>
-                      <a:tailEnd type="none" w="med" len="med"/>
-                    </a:lnL>
-                    <a:lnR w="6350" cap="flat" cmpd="sng" algn="ctr">
-                      <a:solidFill>
-                        <a:srgbClr val="E5E7EB"/>
-                      </a:solidFill>
-                      <a:prstDash val="solid"/>
-                      <a:round/>
-                      <a:headEnd type="none" w="med" len="med"/>
-                      <a:tailEnd type="none" w="med" len="med"/>
-                    </a:lnR>
-                    <a:lnT w="6350" cap="flat" cmpd="sng" algn="ctr">
-                      <a:solidFill>
-                        <a:srgbClr val="E5E7EB"/>
-                      </a:solidFill>
-                      <a:prstDash val="solid"/>
-                      <a:round/>
-                      <a:headEnd type="none" w="med" len="med"/>
-                      <a:tailEnd type="none" w="med" len="med"/>
-                    </a:lnT>
-                    <a:lnB w="6350" cap="flat" cmpd="sng" algn="ctr">
-                      <a:solidFill>
-                        <a:srgbClr val="E5E7EB"/>
-                      </a:solidFill>
-                      <a:prstDash val="solid"/>
-                      <a:round/>
-                      <a:headEnd type="none" w="med" len="med"/>
-                      <a:tailEnd type="none" w="med" len="med"/>
-                    </a:lnB>
-                  </a:tcPr>
-                </a:tc>
-                <a:tc>
-                  <a:txBody>
-                    <a:bodyPr/>
-                    <a:lstStyle/>
-                    <a:p>
-                      <a:pPr indent="0" marL="0">
-                        <a:buNone/>
-                      </a:pPr>
-                      <a:r>
-                        <a:rPr lang="en-US" sz="1100" dirty="0">
-                          <a:solidFill>
-                            <a:srgbClr val="374151"/>
-                          </a:solidFill>
-                          <a:latin typeface="Apple SD Gothic Neo" pitchFamily="34" charset="0"/>
-                          <a:ea typeface="Apple SD Gothic Neo" pitchFamily="34" charset="-122"/>
-                          <a:cs typeface="Apple SD Gothic Neo" pitchFamily="34" charset="-120"/>
-                        </a:rPr>
-                        <a:t>노란색</a:t>
-                      </a:r>
-                      <a:endParaRPr lang="en-US" sz="1100" dirty="0">
-                        <a:latin typeface="Apple SD Gothic Neo" charset="0"/>
-                        <a:ea typeface="Apple SD Gothic Neo" charset="0"/>
-                        <a:cs typeface="Apple SD Gothic Neo" charset="0"/>
-                      </a:endParaRPr>
-                    </a:p>
-                  </a:txBody>
-                  <a:tcPr marL="91440" marR="91440" marT="45720" marB="45720">
-                    <a:lnL w="6350" cap="flat" cmpd="sng" algn="ctr">
-                      <a:solidFill>
-                        <a:srgbClr val="E5E7EB"/>
-                      </a:solidFill>
-                      <a:prstDash val="solid"/>
-                      <a:round/>
-                      <a:headEnd type="none" w="med" len="med"/>
-                      <a:tailEnd type="none" w="med" len="med"/>
-                    </a:lnL>
-                    <a:lnR w="6350" cap="flat" cmpd="sng" algn="ctr">
-                      <a:solidFill>
-                        <a:srgbClr val="E5E7EB"/>
-                      </a:solidFill>
-                      <a:prstDash val="solid"/>
-                      <a:round/>
-                      <a:headEnd type="none" w="med" len="med"/>
-                      <a:tailEnd type="none" w="med" len="med"/>
-                    </a:lnR>
-                    <a:lnT w="6350" cap="flat" cmpd="sng" algn="ctr">
-                      <a:solidFill>
-                        <a:srgbClr val="E5E7EB"/>
-                      </a:solidFill>
-                      <a:prstDash val="solid"/>
-                      <a:round/>
-                      <a:headEnd type="none" w="med" len="med"/>
-                      <a:tailEnd type="none" w="med" len="med"/>
-                    </a:lnT>
-                    <a:lnB w="6350" cap="flat" cmpd="sng" algn="ctr">
-                      <a:solidFill>
-                        <a:srgbClr val="E5E7EB"/>
-                      </a:solidFill>
-                      <a:prstDash val="solid"/>
-                      <a:round/>
-                      <a:headEnd type="none" w="med" len="med"/>
-                      <a:tailEnd type="none" w="med" len="med"/>
-                    </a:lnB>
-                  </a:tcPr>
-                </a:tc>
-                <a:tc>
-                  <a:txBody>
-                    <a:bodyPr/>
-                    <a:lstStyle/>
-                    <a:p>
-                      <a:pPr indent="0" marL="0">
-                        <a:buNone/>
-                      </a:pPr>
-                      <a:r>
-                        <a:rPr lang="en-US" sz="1100" dirty="0">
-                          <a:solidFill>
-                            <a:srgbClr val="374151"/>
-                          </a:solidFill>
-                          <a:latin typeface="Apple SD Gothic Neo" pitchFamily="34" charset="0"/>
-                          <a:ea typeface="Apple SD Gothic Neo" pitchFamily="34" charset="-122"/>
-                          <a:cs typeface="Apple SD Gothic Neo" pitchFamily="34" charset="-120"/>
-                        </a:rPr>
-                        <a:t>인터넷 연결 없음</a:t>
-                      </a:r>
-                      <a:endParaRPr lang="en-US" sz="1100" dirty="0">
-                        <a:latin typeface="Apple SD Gothic Neo" charset="0"/>
-                        <a:ea typeface="Apple SD Gothic Neo" charset="0"/>
-                        <a:cs typeface="Apple SD Gothic Neo" charset="0"/>
-                      </a:endParaRPr>
-                    </a:p>
-                  </a:txBody>
-                  <a:tcPr marL="91440" marR="91440" marT="45720" marB="45720">
-                    <a:lnL w="6350" cap="flat" cmpd="sng" algn="ctr">
-                      <a:solidFill>
-                        <a:srgbClr val="E5E7EB"/>
-                      </a:solidFill>
-                      <a:prstDash val="solid"/>
-                      <a:round/>
-                      <a:headEnd type="none" w="med" len="med"/>
-                      <a:tailEnd type="none" w="med" len="med"/>
-                    </a:lnL>
-                    <a:lnR w="6350" cap="flat" cmpd="sng" algn="ctr">
-                      <a:solidFill>
-                        <a:srgbClr val="E5E7EB"/>
-                      </a:solidFill>
-                      <a:prstDash val="solid"/>
-                      <a:round/>
-                      <a:headEnd type="none" w="med" len="med"/>
-                      <a:tailEnd type="none" w="med" len="med"/>
-                    </a:lnR>
-                    <a:lnT w="6350" cap="flat" cmpd="sng" algn="ctr">
-                      <a:solidFill>
-                        <a:srgbClr val="E5E7EB"/>
-                      </a:solidFill>
-                      <a:prstDash val="solid"/>
-                      <a:round/>
-                      <a:headEnd type="none" w="med" len="med"/>
-                      <a:tailEnd type="none" w="med" len="med"/>
-                    </a:lnT>
-                    <a:lnB w="6350" cap="flat" cmpd="sng" algn="ctr">
-                      <a:solidFill>
-                        <a:srgbClr val="E5E7EB"/>
-                      </a:solidFill>
-                      <a:prstDash val="solid"/>
-                      <a:round/>
-                      <a:headEnd type="none" w="med" len="med"/>
-                      <a:tailEnd type="none" w="med" len="med"/>
-                    </a:lnB>
-                  </a:tcPr>
-                </a:tc>
-              </a:tr>
-              <a:tr h="0">
-                <a:tc>
-                  <a:txBody>
-                    <a:bodyPr/>
-                    <a:lstStyle/>
-                    <a:p>
-                      <a:pPr indent="0" marL="0">
-                        <a:buNone/>
-                      </a:pPr>
-                      <a:r>
-                        <a:rPr lang="en-US" sz="1100" dirty="0">
-                          <a:solidFill>
-                            <a:srgbClr val="374151"/>
-                          </a:solidFill>
-                          <a:latin typeface="Apple SD Gothic Neo" pitchFamily="34" charset="0"/>
-                          <a:ea typeface="Apple SD Gothic Neo" pitchFamily="34" charset="-122"/>
-                          <a:cs typeface="Apple SD Gothic Neo" pitchFamily="34" charset="-120"/>
-                        </a:rPr>
-                        <a:t>동기화 대기</a:t>
-                      </a:r>
-                      <a:endParaRPr lang="en-US" sz="1100" dirty="0">
-                        <a:latin typeface="Apple SD Gothic Neo" charset="0"/>
-                        <a:ea typeface="Apple SD Gothic Neo" charset="0"/>
-                        <a:cs typeface="Apple SD Gothic Neo" charset="0"/>
-                      </a:endParaRPr>
-                    </a:p>
-                  </a:txBody>
-                  <a:tcPr marL="91440" marR="91440" marT="45720" marB="45720">
-                    <a:lnL w="6350" cap="flat" cmpd="sng" algn="ctr">
-                      <a:solidFill>
-                        <a:srgbClr val="E5E7EB"/>
-                      </a:solidFill>
-                      <a:prstDash val="solid"/>
-                      <a:round/>
-                      <a:headEnd type="none" w="med" len="med"/>
-                      <a:tailEnd type="none" w="med" len="med"/>
-                    </a:lnL>
-                    <a:lnR w="6350" cap="flat" cmpd="sng" algn="ctr">
-                      <a:solidFill>
-                        <a:srgbClr val="E5E7EB"/>
-                      </a:solidFill>
-                      <a:prstDash val="solid"/>
-                      <a:round/>
-                      <a:headEnd type="none" w="med" len="med"/>
-                      <a:tailEnd type="none" w="med" len="med"/>
-                    </a:lnR>
-                    <a:lnT w="6350" cap="flat" cmpd="sng" algn="ctr">
-                      <a:solidFill>
-                        <a:srgbClr val="E5E7EB"/>
-                      </a:solidFill>
-                      <a:prstDash val="solid"/>
-                      <a:round/>
-                      <a:headEnd type="none" w="med" len="med"/>
-                      <a:tailEnd type="none" w="med" len="med"/>
-                    </a:lnT>
-                    <a:lnB w="6350" cap="flat" cmpd="sng" algn="ctr">
-                      <a:solidFill>
-                        <a:srgbClr val="E5E7EB"/>
-                      </a:solidFill>
-                      <a:prstDash val="solid"/>
-                      <a:round/>
-                      <a:headEnd type="none" w="med" len="med"/>
-                      <a:tailEnd type="none" w="med" len="med"/>
-                    </a:lnB>
-                  </a:tcPr>
-                </a:tc>
-                <a:tc>
-                  <a:txBody>
-                    <a:bodyPr/>
-                    <a:lstStyle/>
-                    <a:p>
-                      <a:pPr indent="0" marL="0">
-                        <a:buNone/>
-                      </a:pPr>
-                      <a:r>
-                        <a:rPr lang="en-US" sz="1100" dirty="0">
-                          <a:solidFill>
-                            <a:srgbClr val="374151"/>
-                          </a:solidFill>
-                          <a:latin typeface="Apple SD Gothic Neo" pitchFamily="34" charset="0"/>
-                          <a:ea typeface="Apple SD Gothic Neo" pitchFamily="34" charset="-122"/>
-                          <a:cs typeface="Apple SD Gothic Neo" pitchFamily="34" charset="-120"/>
-                        </a:rPr>
-                        <a:t>파란색</a:t>
-                      </a:r>
-                      <a:endParaRPr lang="en-US" sz="1100" dirty="0">
-                        <a:latin typeface="Apple SD Gothic Neo" charset="0"/>
-                        <a:ea typeface="Apple SD Gothic Neo" charset="0"/>
-                        <a:cs typeface="Apple SD Gothic Neo" charset="0"/>
-                      </a:endParaRPr>
-                    </a:p>
-                  </a:txBody>
-                  <a:tcPr marL="91440" marR="91440" marT="45720" marB="45720">
-                    <a:lnL w="6350" cap="flat" cmpd="sng" algn="ctr">
-                      <a:solidFill>
-                        <a:srgbClr val="E5E7EB"/>
-                      </a:solidFill>
-                      <a:prstDash val="solid"/>
-                      <a:round/>
-                      <a:headEnd type="none" w="med" len="med"/>
-                      <a:tailEnd type="none" w="med" len="med"/>
-                    </a:lnL>
-                    <a:lnR w="6350" cap="flat" cmpd="sng" algn="ctr">
-                      <a:solidFill>
-                        <a:srgbClr val="E5E7EB"/>
-                      </a:solidFill>
-                      <a:prstDash val="solid"/>
-                      <a:round/>
-                      <a:headEnd type="none" w="med" len="med"/>
-                      <a:tailEnd type="none" w="med" len="med"/>
-                    </a:lnR>
-                    <a:lnT w="6350" cap="flat" cmpd="sng" algn="ctr">
-                      <a:solidFill>
-                        <a:srgbClr val="E5E7EB"/>
-                      </a:solidFill>
-                      <a:prstDash val="solid"/>
-                      <a:round/>
-                      <a:headEnd type="none" w="med" len="med"/>
-                      <a:tailEnd type="none" w="med" len="med"/>
-                    </a:lnT>
-                    <a:lnB w="6350" cap="flat" cmpd="sng" algn="ctr">
-                      <a:solidFill>
-                        <a:srgbClr val="E5E7EB"/>
-                      </a:solidFill>
-                      <a:prstDash val="solid"/>
-                      <a:round/>
-                      <a:headEnd type="none" w="med" len="med"/>
-                      <a:tailEnd type="none" w="med" len="med"/>
-                    </a:lnB>
-                  </a:tcPr>
-                </a:tc>
-                <a:tc>
-                  <a:txBody>
-                    <a:bodyPr/>
-                    <a:lstStyle/>
-                    <a:p>
-                      <a:pPr indent="0" marL="0">
-                        <a:buNone/>
-                      </a:pPr>
-                      <a:r>
-                        <a:rPr lang="en-US" sz="1100" dirty="0">
-                          <a:solidFill>
-                            <a:srgbClr val="374151"/>
-                          </a:solidFill>
-                          <a:latin typeface="Apple SD Gothic Neo" pitchFamily="34" charset="0"/>
-                          <a:ea typeface="Apple SD Gothic Neo" pitchFamily="34" charset="-122"/>
-                          <a:cs typeface="Apple SD Gothic Neo" pitchFamily="34" charset="-120"/>
-                        </a:rPr>
-                        <a:t>N개 항목 대기 중</a:t>
-                      </a:r>
-                      <a:endParaRPr lang="en-US" sz="1100" dirty="0">
-                        <a:latin typeface="Apple SD Gothic Neo" charset="0"/>
-                        <a:ea typeface="Apple SD Gothic Neo" charset="0"/>
-                        <a:cs typeface="Apple SD Gothic Neo" charset="0"/>
-                      </a:endParaRPr>
-                    </a:p>
-                  </a:txBody>
-                  <a:tcPr marL="91440" marR="91440" marT="45720" marB="45720">
-                    <a:lnL w="6350" cap="flat" cmpd="sng" algn="ctr">
-                      <a:solidFill>
-                        <a:srgbClr val="E5E7EB"/>
-                      </a:solidFill>
-                      <a:prstDash val="solid"/>
-                      <a:round/>
-                      <a:headEnd type="none" w="med" len="med"/>
-                      <a:tailEnd type="none" w="med" len="med"/>
-                    </a:lnL>
-                    <a:lnR w="6350" cap="flat" cmpd="sng" algn="ctr">
-                      <a:solidFill>
-                        <a:srgbClr val="E5E7EB"/>
-                      </a:solidFill>
-                      <a:prstDash val="solid"/>
-                      <a:round/>
-                      <a:headEnd type="none" w="med" len="med"/>
-                      <a:tailEnd type="none" w="med" len="med"/>
-                    </a:lnR>
-                    <a:lnT w="6350" cap="flat" cmpd="sng" algn="ctr">
-                      <a:solidFill>
-                        <a:srgbClr val="E5E7EB"/>
-                      </a:solidFill>
-                      <a:prstDash val="solid"/>
-                      <a:round/>
-                      <a:headEnd type="none" w="med" len="med"/>
-                      <a:tailEnd type="none" w="med" len="med"/>
-                    </a:lnT>
-                    <a:lnB w="6350" cap="flat" cmpd="sng" algn="ctr">
-                      <a:solidFill>
-                        <a:srgbClr val="E5E7EB"/>
-                      </a:solidFill>
-                      <a:prstDash val="solid"/>
-                      <a:round/>
-                      <a:headEnd type="none" w="med" len="med"/>
-                      <a:tailEnd type="none" w="med" len="med"/>
-                    </a:lnB>
-                  </a:tcPr>
-                </a:tc>
-              </a:tr>
-              <a:tr h="0">
-                <a:tc>
-                  <a:txBody>
-                    <a:bodyPr/>
-                    <a:lstStyle/>
-                    <a:p>
-                      <a:pPr indent="0" marL="0">
-                        <a:buNone/>
-                      </a:pPr>
-                      <a:r>
-                        <a:rPr lang="en-US" sz="1100" dirty="0">
-                          <a:solidFill>
-                            <a:srgbClr val="374151"/>
-                          </a:solidFill>
-                          <a:latin typeface="Apple SD Gothic Neo" pitchFamily="34" charset="0"/>
-                          <a:ea typeface="Apple SD Gothic Neo" pitchFamily="34" charset="-122"/>
-                          <a:cs typeface="Apple SD Gothic Neo" pitchFamily="34" charset="-120"/>
-                        </a:rPr>
-                        <a:t>동기화 완료</a:t>
-                      </a:r>
-                      <a:endParaRPr lang="en-US" sz="1100" dirty="0">
-                        <a:latin typeface="Apple SD Gothic Neo" charset="0"/>
-                        <a:ea typeface="Apple SD Gothic Neo" charset="0"/>
-                        <a:cs typeface="Apple SD Gothic Neo" charset="0"/>
-                      </a:endParaRPr>
-                    </a:p>
-                  </a:txBody>
-                  <a:tcPr marL="91440" marR="91440" marT="45720" marB="45720">
-                    <a:lnL w="6350" cap="flat" cmpd="sng" algn="ctr">
-                      <a:solidFill>
-                        <a:srgbClr val="E5E7EB"/>
-                      </a:solidFill>
-                      <a:prstDash val="solid"/>
-                      <a:round/>
-                      <a:headEnd type="none" w="med" len="med"/>
-                      <a:tailEnd type="none" w="med" len="med"/>
-                    </a:lnL>
-                    <a:lnR w="6350" cap="flat" cmpd="sng" algn="ctr">
-                      <a:solidFill>
-                        <a:srgbClr val="E5E7EB"/>
-                      </a:solidFill>
-                      <a:prstDash val="solid"/>
-                      <a:round/>
-                      <a:headEnd type="none" w="med" len="med"/>
-                      <a:tailEnd type="none" w="med" len="med"/>
-                    </a:lnR>
-                    <a:lnT w="6350" cap="flat" cmpd="sng" algn="ctr">
-                      <a:solidFill>
-                        <a:srgbClr val="E5E7EB"/>
-                      </a:solidFill>
-                      <a:prstDash val="solid"/>
-                      <a:round/>
-                      <a:headEnd type="none" w="med" len="med"/>
-                      <a:tailEnd type="none" w="med" len="med"/>
-                    </a:lnT>
-                    <a:lnB w="6350" cap="flat" cmpd="sng" algn="ctr">
-                      <a:solidFill>
-                        <a:srgbClr val="E5E7EB"/>
-                      </a:solidFill>
-                      <a:prstDash val="solid"/>
-                      <a:round/>
-                      <a:headEnd type="none" w="med" len="med"/>
-                      <a:tailEnd type="none" w="med" len="med"/>
-                    </a:lnB>
-                  </a:tcPr>
-                </a:tc>
-                <a:tc>
-                  <a:txBody>
-                    <a:bodyPr/>
-                    <a:lstStyle/>
-                    <a:p>
-                      <a:pPr indent="0" marL="0">
-                        <a:buNone/>
-                      </a:pPr>
-                      <a:r>
-                        <a:rPr lang="en-US" sz="1100" dirty="0">
-                          <a:solidFill>
-                            <a:srgbClr val="374151"/>
-                          </a:solidFill>
-                          <a:latin typeface="Apple SD Gothic Neo" pitchFamily="34" charset="0"/>
-                          <a:ea typeface="Apple SD Gothic Neo" pitchFamily="34" charset="-122"/>
-                          <a:cs typeface="Apple SD Gothic Neo" pitchFamily="34" charset="-120"/>
-                        </a:rPr>
-                        <a:t>녹색</a:t>
-                      </a:r>
-                      <a:endParaRPr lang="en-US" sz="1100" dirty="0">
-                        <a:latin typeface="Apple SD Gothic Neo" charset="0"/>
-                        <a:ea typeface="Apple SD Gothic Neo" charset="0"/>
-                        <a:cs typeface="Apple SD Gothic Neo" charset="0"/>
-                      </a:endParaRPr>
-                    </a:p>
-                  </a:txBody>
-                  <a:tcPr marL="91440" marR="91440" marT="45720" marB="45720">
-                    <a:lnL w="6350" cap="flat" cmpd="sng" algn="ctr">
-                      <a:solidFill>
-                        <a:srgbClr val="E5E7EB"/>
-                      </a:solidFill>
-                      <a:prstDash val="solid"/>
-                      <a:round/>
-                      <a:headEnd type="none" w="med" len="med"/>
-                      <a:tailEnd type="none" w="med" len="med"/>
-                    </a:lnL>
-                    <a:lnR w="6350" cap="flat" cmpd="sng" algn="ctr">
-                      <a:solidFill>
-                        <a:srgbClr val="E5E7EB"/>
-                      </a:solidFill>
-                      <a:prstDash val="solid"/>
-                      <a:round/>
-                      <a:headEnd type="none" w="med" len="med"/>
-                      <a:tailEnd type="none" w="med" len="med"/>
-                    </a:lnR>
-                    <a:lnT w="6350" cap="flat" cmpd="sng" algn="ctr">
-                      <a:solidFill>
-                        <a:srgbClr val="E5E7EB"/>
-                      </a:solidFill>
-                      <a:prstDash val="solid"/>
-                      <a:round/>
-                      <a:headEnd type="none" w="med" len="med"/>
-                      <a:tailEnd type="none" w="med" len="med"/>
-                    </a:lnT>
-                    <a:lnB w="6350" cap="flat" cmpd="sng" algn="ctr">
-                      <a:solidFill>
-                        <a:srgbClr val="E5E7EB"/>
-                      </a:solidFill>
-                      <a:prstDash val="solid"/>
-                      <a:round/>
-                      <a:headEnd type="none" w="med" len="med"/>
-                      <a:tailEnd type="none" w="med" len="med"/>
-                    </a:lnB>
-                  </a:tcPr>
-                </a:tc>
-                <a:tc>
-                  <a:txBody>
-                    <a:bodyPr/>
-                    <a:lstStyle/>
-                    <a:p>
-                      <a:pPr indent="0" marL="0">
-                        <a:buNone/>
-                      </a:pPr>
-                      <a:r>
-                        <a:rPr lang="en-US" sz="1100" dirty="0">
-                          <a:solidFill>
-                            <a:srgbClr val="374151"/>
-                          </a:solidFill>
-                          <a:latin typeface="Apple SD Gothic Neo" pitchFamily="34" charset="0"/>
-                          <a:ea typeface="Apple SD Gothic Neo" pitchFamily="34" charset="-122"/>
-                          <a:cs typeface="Apple SD Gothic Neo" pitchFamily="34" charset="-120"/>
-                        </a:rPr>
-                        <a:t>모든 데이터 동기화됨</a:t>
-                      </a:r>
-                      <a:endParaRPr lang="en-US" sz="1100" dirty="0">
-                        <a:latin typeface="Apple SD Gothic Neo" charset="0"/>
-                        <a:ea typeface="Apple SD Gothic Neo" charset="0"/>
-                        <a:cs typeface="Apple SD Gothic Neo" charset="0"/>
-                      </a:endParaRPr>
-                    </a:p>
-                  </a:txBody>
-                  <a:tcPr marL="91440" marR="91440" marT="45720" marB="45720">
-                    <a:lnL w="6350" cap="flat" cmpd="sng" algn="ctr">
-                      <a:solidFill>
-                        <a:srgbClr val="E5E7EB"/>
-                      </a:solidFill>
-                      <a:prstDash val="solid"/>
-                      <a:round/>
-                      <a:headEnd type="none" w="med" len="med"/>
-                      <a:tailEnd type="none" w="med" len="med"/>
-                    </a:lnL>
-                    <a:lnR w="6350" cap="flat" cmpd="sng" algn="ctr">
-                      <a:solidFill>
-                        <a:srgbClr val="E5E7EB"/>
-                      </a:solidFill>
-                      <a:prstDash val="solid"/>
-                      <a:round/>
-                      <a:headEnd type="none" w="med" len="med"/>
-                      <a:tailEnd type="none" w="med" len="med"/>
-                    </a:lnR>
-                    <a:lnT w="6350" cap="flat" cmpd="sng" algn="ctr">
-                      <a:solidFill>
-                        <a:srgbClr val="E5E7EB"/>
-                      </a:solidFill>
-                      <a:prstDash val="solid"/>
-                      <a:round/>
-                      <a:headEnd type="none" w="med" len="med"/>
-                      <a:tailEnd type="none" w="med" len="med"/>
-                    </a:lnT>
-                    <a:lnB w="6350" cap="flat" cmpd="sng" algn="ctr">
-                      <a:solidFill>
-                        <a:srgbClr val="E5E7EB"/>
-                      </a:solidFill>
-                      <a:prstDash val="solid"/>
-                      <a:round/>
-                      <a:headEnd type="none" w="med" len="med"/>
-                      <a:tailEnd type="none" w="med" len="med"/>
-                    </a:lnB>
-                  </a:tcPr>
-                </a:tc>
-              </a:tr>
-              <a:tr h="0">
-                <a:tc>
-                  <a:txBody>
-                    <a:bodyPr/>
-                    <a:lstStyle/>
-                    <a:p>
-                      <a:pPr indent="0" marL="0">
-                        <a:buNone/>
-                      </a:pPr>
-                      <a:r>
-                        <a:rPr lang="en-US" sz="1100" dirty="0">
-                          <a:solidFill>
-                            <a:srgbClr val="374151"/>
-                          </a:solidFill>
-                          <a:latin typeface="Apple SD Gothic Neo" pitchFamily="34" charset="0"/>
-                          <a:ea typeface="Apple SD Gothic Neo" pitchFamily="34" charset="-122"/>
-                          <a:cs typeface="Apple SD Gothic Neo" pitchFamily="34" charset="-120"/>
-                        </a:rPr>
-                        <a:t>동기화 실패</a:t>
-                      </a:r>
-                      <a:endParaRPr lang="en-US" sz="1100" dirty="0">
-                        <a:latin typeface="Apple SD Gothic Neo" charset="0"/>
-                        <a:ea typeface="Apple SD Gothic Neo" charset="0"/>
-                        <a:cs typeface="Apple SD Gothic Neo" charset="0"/>
-                      </a:endParaRPr>
-                    </a:p>
-                  </a:txBody>
-                  <a:tcPr marL="91440" marR="91440" marT="45720" marB="45720">
-                    <a:lnL w="6350" cap="flat" cmpd="sng" algn="ctr">
-                      <a:solidFill>
-                        <a:srgbClr val="E5E7EB"/>
-                      </a:solidFill>
-                      <a:prstDash val="solid"/>
-                      <a:round/>
-                      <a:headEnd type="none" w="med" len="med"/>
-                      <a:tailEnd type="none" w="med" len="med"/>
-                    </a:lnL>
-                    <a:lnR w="6350" cap="flat" cmpd="sng" algn="ctr">
-                      <a:solidFill>
-                        <a:srgbClr val="E5E7EB"/>
-                      </a:solidFill>
-                      <a:prstDash val="solid"/>
-                      <a:round/>
-                      <a:headEnd type="none" w="med" len="med"/>
-                      <a:tailEnd type="none" w="med" len="med"/>
-                    </a:lnR>
-                    <a:lnT w="6350" cap="flat" cmpd="sng" algn="ctr">
-                      <a:solidFill>
-                        <a:srgbClr val="E5E7EB"/>
-                      </a:solidFill>
-                      <a:prstDash val="solid"/>
-                      <a:round/>
-                      <a:headEnd type="none" w="med" len="med"/>
-                      <a:tailEnd type="none" w="med" len="med"/>
-                    </a:lnT>
-                    <a:lnB w="6350" cap="flat" cmpd="sng" algn="ctr">
-                      <a:solidFill>
-                        <a:srgbClr val="E5E7EB"/>
-                      </a:solidFill>
-                      <a:prstDash val="solid"/>
-                      <a:round/>
-                      <a:headEnd type="none" w="med" len="med"/>
-                      <a:tailEnd type="none" w="med" len="med"/>
-                    </a:lnB>
-                  </a:tcPr>
-                </a:tc>
-                <a:tc>
-                  <a:txBody>
-                    <a:bodyPr/>
-                    <a:lstStyle/>
-                    <a:p>
-                      <a:pPr indent="0" marL="0">
-                        <a:buNone/>
-                      </a:pPr>
-                      <a:r>
-                        <a:rPr lang="en-US" sz="1100" dirty="0">
-                          <a:solidFill>
-                            <a:srgbClr val="374151"/>
-                          </a:solidFill>
-                          <a:latin typeface="Apple SD Gothic Neo" pitchFamily="34" charset="0"/>
-                          <a:ea typeface="Apple SD Gothic Neo" pitchFamily="34" charset="-122"/>
-                          <a:cs typeface="Apple SD Gothic Neo" pitchFamily="34" charset="-120"/>
-                        </a:rPr>
-                        <a:t>빨간색</a:t>
-                      </a:r>
-                      <a:endParaRPr lang="en-US" sz="1100" dirty="0">
-                        <a:latin typeface="Apple SD Gothic Neo" charset="0"/>
-                        <a:ea typeface="Apple SD Gothic Neo" charset="0"/>
-                        <a:cs typeface="Apple SD Gothic Neo" charset="0"/>
-                      </a:endParaRPr>
-                    </a:p>
-                  </a:txBody>
-                  <a:tcPr marL="91440" marR="91440" marT="45720" marB="45720">
-                    <a:lnL w="6350" cap="flat" cmpd="sng" algn="ctr">
-                      <a:solidFill>
-                        <a:srgbClr val="E5E7EB"/>
-                      </a:solidFill>
-                      <a:prstDash val="solid"/>
-                      <a:round/>
-                      <a:headEnd type="none" w="med" len="med"/>
-                      <a:tailEnd type="none" w="med" len="med"/>
-                    </a:lnL>
-                    <a:lnR w="6350" cap="flat" cmpd="sng" algn="ctr">
-                      <a:solidFill>
-                        <a:srgbClr val="E5E7EB"/>
-                      </a:solidFill>
-                      <a:prstDash val="solid"/>
-                      <a:round/>
-                      <a:headEnd type="none" w="med" len="med"/>
-                      <a:tailEnd type="none" w="med" len="med"/>
-                    </a:lnR>
-                    <a:lnT w="6350" cap="flat" cmpd="sng" algn="ctr">
-                      <a:solidFill>
-                        <a:srgbClr val="E5E7EB"/>
-                      </a:solidFill>
-                      <a:prstDash val="solid"/>
-                      <a:round/>
-                      <a:headEnd type="none" w="med" len="med"/>
-                      <a:tailEnd type="none" w="med" len="med"/>
-                    </a:lnT>
-                    <a:lnB w="6350" cap="flat" cmpd="sng" algn="ctr">
-                      <a:solidFill>
-                        <a:srgbClr val="E5E7EB"/>
-                      </a:solidFill>
-                      <a:prstDash val="solid"/>
-                      <a:round/>
-                      <a:headEnd type="none" w="med" len="med"/>
-                      <a:tailEnd type="none" w="med" len="med"/>
-                    </a:lnB>
-                  </a:tcPr>
-                </a:tc>
-                <a:tc>
-                  <a:txBody>
-                    <a:bodyPr/>
-                    <a:lstStyle/>
-                    <a:p>
-                      <a:pPr indent="0" marL="0">
-                        <a:buNone/>
-                      </a:pPr>
-                      <a:r>
-                        <a:rPr lang="en-US" sz="1100" dirty="0">
-                          <a:solidFill>
-                            <a:srgbClr val="374151"/>
-                          </a:solidFill>
-                          <a:latin typeface="Apple SD Gothic Neo" pitchFamily="34" charset="0"/>
-                          <a:ea typeface="Apple SD Gothic Neo" pitchFamily="34" charset="-122"/>
-                          <a:cs typeface="Apple SD Gothic Neo" pitchFamily="34" charset="-120"/>
-                        </a:rPr>
-                        <a:t>오류 발생</a:t>
-                      </a:r>
-                      <a:endParaRPr lang="en-US" sz="1100" dirty="0">
-                        <a:latin typeface="Apple SD Gothic Neo" charset="0"/>
-                        <a:ea typeface="Apple SD Gothic Neo" charset="0"/>
-                        <a:cs typeface="Apple SD Gothic Neo" charset="0"/>
-                      </a:endParaRPr>
-                    </a:p>
-                  </a:txBody>
-                  <a:tcPr marL="91440" marR="91440" marT="45720" marB="45720">
-                    <a:lnL w="6350" cap="flat" cmpd="sng" algn="ctr">
-                      <a:solidFill>
-                        <a:srgbClr val="E5E7EB"/>
-                      </a:solidFill>
-                      <a:prstDash val="solid"/>
-                      <a:round/>
-                      <a:headEnd type="none" w="med" len="med"/>
-                      <a:tailEnd type="none" w="med" len="med"/>
-                    </a:lnL>
-                    <a:lnR w="6350" cap="flat" cmpd="sng" algn="ctr">
-                      <a:solidFill>
-                        <a:srgbClr val="E5E7EB"/>
-                      </a:solidFill>
-                      <a:prstDash val="solid"/>
-                      <a:round/>
-                      <a:headEnd type="none" w="med" len="med"/>
-                      <a:tailEnd type="none" w="med" len="med"/>
-                    </a:lnR>
-                    <a:lnT w="6350" cap="flat" cmpd="sng" algn="ctr">
-                      <a:solidFill>
-                        <a:srgbClr val="E5E7EB"/>
-                      </a:solidFill>
-                      <a:prstDash val="solid"/>
-                      <a:round/>
-                      <a:headEnd type="none" w="med" len="med"/>
-                      <a:tailEnd type="none" w="med" len="med"/>
-                    </a:lnT>
-                    <a:lnB w="6350" cap="flat" cmpd="sng" algn="ctr">
-                      <a:solidFill>
-                        <a:srgbClr val="E5E7EB"/>
-                      </a:solidFill>
-                      <a:prstDash val="solid"/>
-                      <a:round/>
-                      <a:headEnd type="none" w="med" len="med"/>
-                      <a:tailEnd type="none" w="med" len="med"/>
-                    </a:lnB>
-                  </a:tcPr>
-                </a:tc>
-              </a:tr>
-            </a:tbl>
-          </a:graphicData>
-        </a:graphic>
-      </p:graphicFrame>
+      <p:sp>
+        <p:nvSpPr>
+          <p:cNvPr id="3" name="Text 1"/>
+          <p:cNvSpPr/>
+          <p:nvPr/>
+        </p:nvSpPr>
+        <p:spPr>
+          <a:xfrm>
+            <a:off x="640080" y="914400"/>
+            <a:ext cx="7772400" cy="0"/>
+          </a:xfrm>
+          <a:prstGeom prst="rect">
+            <a:avLst/>
+          </a:prstGeom>
+          <a:noFill/>
+          <a:ln/>
+        </p:spPr>
+        <p:txBody>
+          <a:bodyPr wrap="square" rtlCol="0" anchor="ctr"/>
+          <a:lstStyle/>
+          <a:p>
+            <a:r>
+              <a:rPr lang="en-US" sz="1400" dirty="0">
+                <a:solidFill>
+                  <a:srgbClr val="374151"/>
+                </a:solidFill>
+              </a:rPr>
+              <a:t>인터넷 연결이 끊어지면 화면 상단에 노란색 배너 표시</a:t>
+            </a:r>
+            <a:endParaRPr lang="en-US" sz="1400" dirty="0"/>
+          </a:p>
+        </p:txBody>
+      </p:sp>
+      <p:sp>
+        <p:nvSpPr>
+          <p:cNvPr id="4" name="Text 2"/>
+          <p:cNvSpPr/>
+          <p:nvPr/>
+        </p:nvSpPr>
+        <p:spPr>
+          <a:xfrm>
+            <a:off x="640080" y="1280160"/>
+            <a:ext cx="7772400" cy="0"/>
+          </a:xfrm>
+          <a:prstGeom prst="rect">
+            <a:avLst/>
+          </a:prstGeom>
+          <a:noFill/>
+          <a:ln/>
+        </p:spPr>
+        <p:txBody>
+          <a:bodyPr wrap="square" rtlCol="0" anchor="ctr"/>
+          <a:lstStyle/>
+          <a:p>
+            <a:r>
+              <a:rPr lang="en-US" sz="1400" dirty="0">
+                <a:solidFill>
+                  <a:srgbClr val="374151"/>
+                </a:solidFill>
+              </a:rPr>
+              <a:t>"오프라인 상태입니다. 작성한 내용은 자동으로 저장됩니다."</a:t>
+            </a:r>
+            <a:endParaRPr lang="en-US" sz="1400" dirty="0"/>
+          </a:p>
+        </p:txBody>
+      </p:sp>
+      <p:sp>
+        <p:nvSpPr>
+          <p:cNvPr id="5" name="Text 3"/>
+          <p:cNvSpPr/>
+          <p:nvPr/>
+        </p:nvSpPr>
+        <p:spPr>
+          <a:xfrm>
+            <a:off x="640080" y="1645920"/>
+            <a:ext cx="7772400" cy="0"/>
+          </a:xfrm>
+          <a:prstGeom prst="rect">
+            <a:avLst/>
+          </a:prstGeom>
+          <a:noFill/>
+          <a:ln/>
+        </p:spPr>
+        <p:txBody>
+          <a:bodyPr wrap="square" rtlCol="0" anchor="ctr"/>
+          <a:lstStyle/>
+          <a:p>
+            <a:r>
+              <a:rPr lang="en-US" sz="1400" dirty="0">
+                <a:solidFill>
+                  <a:srgbClr val="374151"/>
+                </a:solidFill>
+              </a:rPr>
+              <a:t>데이터는 브라우저 IndexedDB에 자동 저장</a:t>
+            </a:r>
+            <a:endParaRPr lang="en-US" sz="1400" dirty="0"/>
+          </a:p>
+        </p:txBody>
+      </p:sp>
       <p:sp>
         <p:nvSpPr>
           <p:cNvPr id="25" name="Slide Number Placeholder 0"/>
@@ -5920,22 +6650,45 @@
                   <a:srgbClr val="1E40AF"/>
                 </a:solidFill>
               </a:rPr>
-              <a:t>문제 해결</a:t>
+              <a:t>오프라인 페이지</a:t>
             </a:r>
             <a:endParaRPr lang="en-US" sz="2800" dirty="0"/>
           </a:p>
         </p:txBody>
       </p:sp>
-      <p:sp>
-        <p:nvSpPr>
-          <p:cNvPr id="3" name="Text 1"/>
+      <p:pic>
+        <p:nvPicPr>
+          <p:cNvPr id="3" name="Image 0" descr="/Users/wandosea/Documents/GitHub/expense-system/docs/user-guide/screenshots/offline-page.png">    </p:cNvPr>
+          <p:cNvPicPr>
+            <a:picLocks noChangeAspect="1"/>
+          </p:cNvPicPr>
+          <p:nvPr/>
+        </p:nvPicPr>
+        <p:blipFill>
+          <a:blip r:embed="rId1"/>
+          <a:srcRect l="0" r="0" t="0" b="0"/>
+          <a:stretch/>
+        </p:blipFill>
+        <p:spPr>
+          <a:xfrm>
+            <a:off x="457200" y="914400"/>
+            <a:ext cx="8229600" cy="3657600"/>
+          </a:xfrm>
+          <a:prstGeom prst="rect">
+            <a:avLst/>
+          </a:prstGeom>
+        </p:spPr>
+      </p:pic>
+      <p:sp>
+        <p:nvSpPr>
+          <p:cNvPr id="4" name="Text 1"/>
           <p:cNvSpPr/>
           <p:nvPr/>
         </p:nvSpPr>
         <p:spPr>
           <a:xfrm>
-            <a:off x="640080" y="914400"/>
-            <a:ext cx="7772400" cy="0"/>
+            <a:off x="457200" y="4754880"/>
+            <a:ext cx="8229600" cy="0"/>
           </a:xfrm>
           <a:prstGeom prst="rect">
             <a:avLst/>
@@ -5947,263 +6700,18 @@
           <a:bodyPr wrap="square" rtlCol="0" anchor="ctr"/>
           <a:lstStyle/>
           <a:p>
+            <a:pPr indent="0" marL="0">
+              <a:buNone/>
+            </a:pPr>
             <a:r>
-              <a:rPr lang="en-US" sz="1400" dirty="0">
+              <a:rPr lang="en-US" sz="1200" dirty="0">
                 <a:solidFill>
-                  <a:srgbClr val="374151"/>
+                  <a:srgbClr val="6B7280"/>
                 </a:solidFill>
               </a:rPr>
-              <a:t>설치 옵션이 안 나타남:</a:t>
+              <a:t>인터넷 연결 없이 접근 시 표시되는 페이지</a:t>
             </a:r>
-            <a:endParaRPr lang="en-US" sz="1400" dirty="0"/>
-          </a:p>
-        </p:txBody>
-      </p:sp>
-      <p:sp>
-        <p:nvSpPr>
-          <p:cNvPr id="4" name="Text 2"/>
-          <p:cNvSpPr/>
-          <p:nvPr/>
-        </p:nvSpPr>
-        <p:spPr>
-          <a:xfrm>
-            <a:off x="640080" y="1280160"/>
-            <a:ext cx="7772400" cy="0"/>
-          </a:xfrm>
-          <a:prstGeom prst="rect">
-            <a:avLst/>
-          </a:prstGeom>
-          <a:noFill/>
-          <a:ln/>
-        </p:spPr>
-        <p:txBody>
-          <a:bodyPr wrap="square" rtlCol="0" anchor="ctr"/>
-          <a:lstStyle/>
-          <a:p>
-            <a:r>
-              <a:rPr lang="en-US" sz="1400" dirty="0">
-                <a:solidFill>
-                  <a:srgbClr val="374151"/>
-                </a:solidFill>
-              </a:rPr>
-              <a:t>  - iOS: Safari 브라우저 사용 확인</a:t>
-            </a:r>
-            <a:endParaRPr lang="en-US" sz="1400" dirty="0"/>
-          </a:p>
-        </p:txBody>
-      </p:sp>
-      <p:sp>
-        <p:nvSpPr>
-          <p:cNvPr id="5" name="Text 3"/>
-          <p:cNvSpPr/>
-          <p:nvPr/>
-        </p:nvSpPr>
-        <p:spPr>
-          <a:xfrm>
-            <a:off x="640080" y="1645920"/>
-            <a:ext cx="7772400" cy="0"/>
-          </a:xfrm>
-          <a:prstGeom prst="rect">
-            <a:avLst/>
-          </a:prstGeom>
-          <a:noFill/>
-          <a:ln/>
-        </p:spPr>
-        <p:txBody>
-          <a:bodyPr wrap="square" rtlCol="0" anchor="ctr"/>
-          <a:lstStyle/>
-          <a:p>
-            <a:r>
-              <a:rPr lang="en-US" sz="1400" dirty="0">
-                <a:solidFill>
-                  <a:srgbClr val="374151"/>
-                </a:solidFill>
-              </a:rPr>
-              <a:t>  - Android: HTTPS 연결 확인</a:t>
-            </a:r>
-            <a:endParaRPr lang="en-US" sz="1400" dirty="0"/>
-          </a:p>
-        </p:txBody>
-      </p:sp>
-      <p:sp>
-        <p:nvSpPr>
-          <p:cNvPr id="6" name="Text 4"/>
-          <p:cNvSpPr/>
-          <p:nvPr/>
-        </p:nvSpPr>
-        <p:spPr>
-          <a:xfrm>
-            <a:off x="640080" y="2011680"/>
-            <a:ext cx="7772400" cy="0"/>
-          </a:xfrm>
-          <a:prstGeom prst="rect">
-            <a:avLst/>
-          </a:prstGeom>
-          <a:noFill/>
-          <a:ln/>
-        </p:spPr>
-        <p:txBody>
-          <a:bodyPr wrap="square" rtlCol="0" anchor="ctr"/>
-          <a:lstStyle/>
-          <a:p>
-            <a:endParaRPr lang="en-US" sz="1400" dirty="0"/>
-          </a:p>
-        </p:txBody>
-      </p:sp>
-      <p:sp>
-        <p:nvSpPr>
-          <p:cNvPr id="7" name="Text 5"/>
-          <p:cNvSpPr/>
-          <p:nvPr/>
-        </p:nvSpPr>
-        <p:spPr>
-          <a:xfrm>
-            <a:off x="640080" y="2377440"/>
-            <a:ext cx="7772400" cy="0"/>
-          </a:xfrm>
-          <a:prstGeom prst="rect">
-            <a:avLst/>
-          </a:prstGeom>
-          <a:noFill/>
-          <a:ln/>
-        </p:spPr>
-        <p:txBody>
-          <a:bodyPr wrap="square" rtlCol="0" anchor="ctr"/>
-          <a:lstStyle/>
-          <a:p>
-            <a:r>
-              <a:rPr lang="en-US" sz="1400" dirty="0">
-                <a:solidFill>
-                  <a:srgbClr val="374151"/>
-                </a:solidFill>
-              </a:rPr>
-              <a:t>오프라인에서 작동 안 함:</a:t>
-            </a:r>
-            <a:endParaRPr lang="en-US" sz="1400" dirty="0"/>
-          </a:p>
-        </p:txBody>
-      </p:sp>
-      <p:sp>
-        <p:nvSpPr>
-          <p:cNvPr id="8" name="Text 6"/>
-          <p:cNvSpPr/>
-          <p:nvPr/>
-        </p:nvSpPr>
-        <p:spPr>
-          <a:xfrm>
-            <a:off x="640080" y="2743200"/>
-            <a:ext cx="7772400" cy="0"/>
-          </a:xfrm>
-          <a:prstGeom prst="rect">
-            <a:avLst/>
-          </a:prstGeom>
-          <a:noFill/>
-          <a:ln/>
-        </p:spPr>
-        <p:txBody>
-          <a:bodyPr wrap="square" rtlCol="0" anchor="ctr"/>
-          <a:lstStyle/>
-          <a:p>
-            <a:r>
-              <a:rPr lang="en-US" sz="1400" dirty="0">
-                <a:solidFill>
-                  <a:srgbClr val="374151"/>
-                </a:solidFill>
-              </a:rPr>
-              <a:t>  - 해당 페이지를 온라인에서 한 번 방문 필요</a:t>
-            </a:r>
-            <a:endParaRPr lang="en-US" sz="1400" dirty="0"/>
-          </a:p>
-        </p:txBody>
-      </p:sp>
-      <p:sp>
-        <p:nvSpPr>
-          <p:cNvPr id="9" name="Text 7"/>
-          <p:cNvSpPr/>
-          <p:nvPr/>
-        </p:nvSpPr>
-        <p:spPr>
-          <a:xfrm>
-            <a:off x="640080" y="3108960"/>
-            <a:ext cx="7772400" cy="0"/>
-          </a:xfrm>
-          <a:prstGeom prst="rect">
-            <a:avLst/>
-          </a:prstGeom>
-          <a:noFill/>
-          <a:ln/>
-        </p:spPr>
-        <p:txBody>
-          <a:bodyPr wrap="square" rtlCol="0" anchor="ctr"/>
-          <a:lstStyle/>
-          <a:p>
-            <a:endParaRPr lang="en-US" sz="1400" dirty="0"/>
-          </a:p>
-        </p:txBody>
-      </p:sp>
-      <p:sp>
-        <p:nvSpPr>
-          <p:cNvPr id="10" name="Text 8"/>
-          <p:cNvSpPr/>
-          <p:nvPr/>
-        </p:nvSpPr>
-        <p:spPr>
-          <a:xfrm>
-            <a:off x="640080" y="3474720"/>
-            <a:ext cx="7772400" cy="0"/>
-          </a:xfrm>
-          <a:prstGeom prst="rect">
-            <a:avLst/>
-          </a:prstGeom>
-          <a:noFill/>
-          <a:ln/>
-        </p:spPr>
-        <p:txBody>
-          <a:bodyPr wrap="square" rtlCol="0" anchor="ctr"/>
-          <a:lstStyle/>
-          <a:p>
-            <a:r>
-              <a:rPr lang="en-US" sz="1400" dirty="0">
-                <a:solidFill>
-                  <a:srgbClr val="374151"/>
-                </a:solidFill>
-              </a:rPr>
-              <a:t>동기화가 안 됨:</a:t>
-            </a:r>
-            <a:endParaRPr lang="en-US" sz="1400" dirty="0"/>
-          </a:p>
-        </p:txBody>
-      </p:sp>
-      <p:sp>
-        <p:nvSpPr>
-          <p:cNvPr id="11" name="Text 9"/>
-          <p:cNvSpPr/>
-          <p:nvPr/>
-        </p:nvSpPr>
-        <p:spPr>
-          <a:xfrm>
-            <a:off x="640080" y="3840480"/>
-            <a:ext cx="7772400" cy="0"/>
-          </a:xfrm>
-          <a:prstGeom prst="rect">
-            <a:avLst/>
-          </a:prstGeom>
-          <a:noFill/>
-          <a:ln/>
-        </p:spPr>
-        <p:txBody>
-          <a:bodyPr wrap="square" rtlCol="0" anchor="ctr"/>
-          <a:lstStyle/>
-          <a:p>
-            <a:r>
-              <a:rPr lang="en-US" sz="1400" dirty="0">
-                <a:solidFill>
-                  <a:srgbClr val="374151"/>
-                </a:solidFill>
-              </a:rPr>
-              <a:t>  - "지금 동기화" 버튼 클릭 또는 페이지 새로고침</a:t>
-            </a:r>
-            <a:endParaRPr lang="en-US" sz="1400" dirty="0"/>
+            <a:endParaRPr lang="en-US" sz="1200" dirty="0"/>
           </a:p>
         </p:txBody>
       </p:sp>
